--- a/docs/plots/grant/jx_grant_linsubhr_diff_aki2.pptx
+++ b/docs/plots/grant/jx_grant_linsubhr_diff_aki2.pptx
@@ -2271,7 +2271,7 @@
           </p:nvSpPr>
           <p:spPr>
             <a:xfrm>
-              <a:off x="915645" y="5038294"/>
+              <a:off x="915645" y="5067975"/>
               <a:ext cx="7682587" cy="0"/>
             </a:xfrm>
             <a:custGeom>
@@ -2314,7 +2314,7 @@
           </p:nvSpPr>
           <p:spPr>
             <a:xfrm>
-              <a:off x="915645" y="4273666"/>
+              <a:off x="915645" y="4288924"/>
               <a:ext cx="7682587" cy="0"/>
             </a:xfrm>
             <a:custGeom>
@@ -2357,7 +2357,7 @@
           </p:nvSpPr>
           <p:spPr>
             <a:xfrm>
-              <a:off x="915645" y="3509037"/>
+              <a:off x="915645" y="3509873"/>
               <a:ext cx="7682587" cy="0"/>
             </a:xfrm>
             <a:custGeom>
@@ -2400,7 +2400,7 @@
           </p:nvSpPr>
           <p:spPr>
             <a:xfrm>
-              <a:off x="915645" y="2744409"/>
+              <a:off x="915645" y="2730822"/>
               <a:ext cx="7682587" cy="0"/>
             </a:xfrm>
             <a:custGeom>
@@ -2443,15 +2443,15 @@
           </p:nvSpPr>
           <p:spPr>
             <a:xfrm>
-              <a:off x="1701364" y="2209169"/>
-              <a:ext cx="0" cy="3364365"/>
+              <a:off x="1264853" y="2185486"/>
+              <a:ext cx="0" cy="3427824"/>
             </a:xfrm>
             <a:custGeom>
               <a:avLst/>
               <a:pathLst>
-                <a:path w="0" h="3364365">
+                <a:path w="0" h="3427824">
                   <a:moveTo>
-                    <a:pt x="0" y="3364365"/>
+                    <a:pt x="0" y="3427824"/>
                   </a:moveTo>
                   <a:lnTo>
                     <a:pt x="0" y="0"/>
@@ -2486,15 +2486,15 @@
           </p:nvSpPr>
           <p:spPr>
             <a:xfrm>
-              <a:off x="3447406" y="2209169"/>
-              <a:ext cx="0" cy="3364365"/>
+              <a:off x="2137874" y="2185486"/>
+              <a:ext cx="0" cy="3427824"/>
             </a:xfrm>
             <a:custGeom>
               <a:avLst/>
               <a:pathLst>
-                <a:path w="0" h="3364365">
+                <a:path w="0" h="3427824">
                   <a:moveTo>
-                    <a:pt x="0" y="3364365"/>
+                    <a:pt x="0" y="3427824"/>
                   </a:moveTo>
                   <a:lnTo>
                     <a:pt x="0" y="0"/>
@@ -2529,15 +2529,15 @@
           </p:nvSpPr>
           <p:spPr>
             <a:xfrm>
-              <a:off x="5193449" y="2209169"/>
-              <a:ext cx="0" cy="3364365"/>
+              <a:off x="3010896" y="2185486"/>
+              <a:ext cx="0" cy="3427824"/>
             </a:xfrm>
             <a:custGeom>
               <a:avLst/>
               <a:pathLst>
-                <a:path w="0" h="3364365">
+                <a:path w="0" h="3427824">
                   <a:moveTo>
-                    <a:pt x="0" y="3364365"/>
+                    <a:pt x="0" y="3427824"/>
                   </a:moveTo>
                   <a:lnTo>
                     <a:pt x="0" y="0"/>
@@ -2572,15 +2572,15 @@
           </p:nvSpPr>
           <p:spPr>
             <a:xfrm>
-              <a:off x="6939491" y="2209169"/>
-              <a:ext cx="0" cy="3364365"/>
+              <a:off x="3883917" y="2185486"/>
+              <a:ext cx="0" cy="3427824"/>
             </a:xfrm>
             <a:custGeom>
               <a:avLst/>
               <a:pathLst>
-                <a:path w="0" h="3364365">
+                <a:path w="0" h="3427824">
                   <a:moveTo>
-                    <a:pt x="0" y="3364365"/>
+                    <a:pt x="0" y="3427824"/>
                   </a:moveTo>
                   <a:lnTo>
                     <a:pt x="0" y="0"/>
@@ -2615,26 +2615,26 @@
           </p:nvSpPr>
           <p:spPr>
             <a:xfrm>
-              <a:off x="915645" y="5420609"/>
-              <a:ext cx="7682587" cy="0"/>
+              <a:off x="4756938" y="2185486"/>
+              <a:ext cx="0" cy="3427824"/>
             </a:xfrm>
             <a:custGeom>
               <a:avLst/>
               <a:pathLst>
-                <a:path w="7682587" h="0">
+                <a:path w="0" h="3427824">
                   <a:moveTo>
+                    <a:pt x="0" y="3427824"/>
+                  </a:moveTo>
+                  <a:lnTo>
                     <a:pt x="0" y="0"/>
-                  </a:moveTo>
-                  <a:lnTo>
-                    <a:pt x="7682587" y="0"/>
-                  </a:lnTo>
-                  <a:lnTo>
-                    <a:pt x="7682587" y="0"/>
+                  </a:lnTo>
+                  <a:lnTo>
+                    <a:pt x="0" y="0"/>
                   </a:lnTo>
                 </a:path>
               </a:pathLst>
             </a:custGeom>
-            <a:ln w="17246" cap="flat">
+            <a:ln w="8623" cap="flat">
               <a:solidFill>
                 <a:srgbClr val="EBEBEB">
                   <a:alpha val="100000"/>
@@ -2658,26 +2658,26 @@
           </p:nvSpPr>
           <p:spPr>
             <a:xfrm>
-              <a:off x="915645" y="4655980"/>
-              <a:ext cx="7682587" cy="0"/>
+              <a:off x="5629959" y="2185486"/>
+              <a:ext cx="0" cy="3427824"/>
             </a:xfrm>
             <a:custGeom>
               <a:avLst/>
               <a:pathLst>
-                <a:path w="7682587" h="0">
+                <a:path w="0" h="3427824">
                   <a:moveTo>
+                    <a:pt x="0" y="3427824"/>
+                  </a:moveTo>
+                  <a:lnTo>
                     <a:pt x="0" y="0"/>
-                  </a:moveTo>
-                  <a:lnTo>
-                    <a:pt x="7682587" y="0"/>
-                  </a:lnTo>
-                  <a:lnTo>
-                    <a:pt x="7682587" y="0"/>
+                  </a:lnTo>
+                  <a:lnTo>
+                    <a:pt x="0" y="0"/>
                   </a:lnTo>
                 </a:path>
               </a:pathLst>
             </a:custGeom>
-            <a:ln w="17246" cap="flat">
+            <a:ln w="8623" cap="flat">
               <a:solidFill>
                 <a:srgbClr val="EBEBEB">
                   <a:alpha val="100000"/>
@@ -2701,26 +2701,26 @@
           </p:nvSpPr>
           <p:spPr>
             <a:xfrm>
-              <a:off x="915645" y="3891352"/>
-              <a:ext cx="7682587" cy="0"/>
+              <a:off x="6502981" y="2185486"/>
+              <a:ext cx="0" cy="3427824"/>
             </a:xfrm>
             <a:custGeom>
               <a:avLst/>
               <a:pathLst>
-                <a:path w="7682587" h="0">
+                <a:path w="0" h="3427824">
                   <a:moveTo>
+                    <a:pt x="0" y="3427824"/>
+                  </a:moveTo>
+                  <a:lnTo>
                     <a:pt x="0" y="0"/>
-                  </a:moveTo>
-                  <a:lnTo>
-                    <a:pt x="7682587" y="0"/>
-                  </a:lnTo>
-                  <a:lnTo>
-                    <a:pt x="7682587" y="0"/>
+                  </a:lnTo>
+                  <a:lnTo>
+                    <a:pt x="0" y="0"/>
                   </a:lnTo>
                 </a:path>
               </a:pathLst>
             </a:custGeom>
-            <a:ln w="17246" cap="flat">
+            <a:ln w="8623" cap="flat">
               <a:solidFill>
                 <a:srgbClr val="EBEBEB">
                   <a:alpha val="100000"/>
@@ -2744,26 +2744,26 @@
           </p:nvSpPr>
           <p:spPr>
             <a:xfrm>
-              <a:off x="915645" y="3126723"/>
-              <a:ext cx="7682587" cy="0"/>
+              <a:off x="7376002" y="2185486"/>
+              <a:ext cx="0" cy="3427824"/>
             </a:xfrm>
             <a:custGeom>
               <a:avLst/>
               <a:pathLst>
-                <a:path w="7682587" h="0">
+                <a:path w="0" h="3427824">
                   <a:moveTo>
+                    <a:pt x="0" y="3427824"/>
+                  </a:moveTo>
+                  <a:lnTo>
                     <a:pt x="0" y="0"/>
-                  </a:moveTo>
-                  <a:lnTo>
-                    <a:pt x="7682587" y="0"/>
-                  </a:lnTo>
-                  <a:lnTo>
-                    <a:pt x="7682587" y="0"/>
+                  </a:lnTo>
+                  <a:lnTo>
+                    <a:pt x="0" y="0"/>
                   </a:lnTo>
                 </a:path>
               </a:pathLst>
             </a:custGeom>
-            <a:ln w="17246" cap="flat">
+            <a:ln w="8623" cap="flat">
               <a:solidFill>
                 <a:srgbClr val="EBEBEB">
                   <a:alpha val="100000"/>
@@ -2787,26 +2787,26 @@
           </p:nvSpPr>
           <p:spPr>
             <a:xfrm>
-              <a:off x="915645" y="2362095"/>
-              <a:ext cx="7682587" cy="0"/>
+              <a:off x="8249023" y="2185486"/>
+              <a:ext cx="0" cy="3427824"/>
             </a:xfrm>
             <a:custGeom>
               <a:avLst/>
               <a:pathLst>
-                <a:path w="7682587" h="0">
+                <a:path w="0" h="3427824">
                   <a:moveTo>
+                    <a:pt x="0" y="3427824"/>
+                  </a:moveTo>
+                  <a:lnTo>
                     <a:pt x="0" y="0"/>
-                  </a:moveTo>
-                  <a:lnTo>
-                    <a:pt x="7682587" y="0"/>
-                  </a:lnTo>
-                  <a:lnTo>
-                    <a:pt x="7682587" y="0"/>
+                  </a:lnTo>
+                  <a:lnTo>
+                    <a:pt x="0" y="0"/>
                   </a:lnTo>
                 </a:path>
               </a:pathLst>
             </a:custGeom>
-            <a:ln w="17246" cap="flat">
+            <a:ln w="8623" cap="flat">
               <a:solidFill>
                 <a:srgbClr val="EBEBEB">
                   <a:alpha val="100000"/>
@@ -2830,21 +2830,21 @@
           </p:nvSpPr>
           <p:spPr>
             <a:xfrm>
-              <a:off x="2574385" y="2209169"/>
-              <a:ext cx="0" cy="3364365"/>
+              <a:off x="915645" y="5457500"/>
+              <a:ext cx="7682587" cy="0"/>
             </a:xfrm>
             <a:custGeom>
               <a:avLst/>
               <a:pathLst>
-                <a:path w="0" h="3364365">
+                <a:path w="7682587" h="0">
                   <a:moveTo>
-                    <a:pt x="0" y="3364365"/>
+                    <a:pt x="0" y="0"/>
                   </a:moveTo>
                   <a:lnTo>
-                    <a:pt x="0" y="0"/>
-                  </a:lnTo>
-                  <a:lnTo>
-                    <a:pt x="0" y="0"/>
+                    <a:pt x="7682587" y="0"/>
+                  </a:lnTo>
+                  <a:lnTo>
+                    <a:pt x="7682587" y="0"/>
                   </a:lnTo>
                 </a:path>
               </a:pathLst>
@@ -2873,21 +2873,21 @@
           </p:nvSpPr>
           <p:spPr>
             <a:xfrm>
-              <a:off x="4320427" y="2209169"/>
-              <a:ext cx="0" cy="3364365"/>
+              <a:off x="915645" y="4678449"/>
+              <a:ext cx="7682587" cy="0"/>
             </a:xfrm>
             <a:custGeom>
               <a:avLst/>
               <a:pathLst>
-                <a:path w="0" h="3364365">
+                <a:path w="7682587" h="0">
                   <a:moveTo>
-                    <a:pt x="0" y="3364365"/>
+                    <a:pt x="0" y="0"/>
                   </a:moveTo>
                   <a:lnTo>
-                    <a:pt x="0" y="0"/>
-                  </a:lnTo>
-                  <a:lnTo>
-                    <a:pt x="0" y="0"/>
+                    <a:pt x="7682587" y="0"/>
+                  </a:lnTo>
+                  <a:lnTo>
+                    <a:pt x="7682587" y="0"/>
                   </a:lnTo>
                 </a:path>
               </a:pathLst>
@@ -2916,21 +2916,21 @@
           </p:nvSpPr>
           <p:spPr>
             <a:xfrm>
-              <a:off x="6066470" y="2209169"/>
-              <a:ext cx="0" cy="3364365"/>
+              <a:off x="915645" y="3899398"/>
+              <a:ext cx="7682587" cy="0"/>
             </a:xfrm>
             <a:custGeom>
               <a:avLst/>
               <a:pathLst>
-                <a:path w="0" h="3364365">
+                <a:path w="7682587" h="0">
                   <a:moveTo>
-                    <a:pt x="0" y="3364365"/>
+                    <a:pt x="0" y="0"/>
                   </a:moveTo>
                   <a:lnTo>
-                    <a:pt x="0" y="0"/>
-                  </a:lnTo>
-                  <a:lnTo>
-                    <a:pt x="0" y="0"/>
+                    <a:pt x="7682587" y="0"/>
+                  </a:lnTo>
+                  <a:lnTo>
+                    <a:pt x="7682587" y="0"/>
                   </a:lnTo>
                 </a:path>
               </a:pathLst>
@@ -2959,21 +2959,21 @@
           </p:nvSpPr>
           <p:spPr>
             <a:xfrm>
-              <a:off x="7812512" y="2209169"/>
-              <a:ext cx="0" cy="3364365"/>
+              <a:off x="915645" y="3120347"/>
+              <a:ext cx="7682587" cy="0"/>
             </a:xfrm>
             <a:custGeom>
               <a:avLst/>
               <a:pathLst>
-                <a:path w="0" h="3364365">
+                <a:path w="7682587" h="0">
                   <a:moveTo>
-                    <a:pt x="0" y="3364365"/>
+                    <a:pt x="0" y="0"/>
                   </a:moveTo>
                   <a:lnTo>
-                    <a:pt x="0" y="0"/>
-                  </a:lnTo>
-                  <a:lnTo>
-                    <a:pt x="0" y="0"/>
+                    <a:pt x="7682587" y="0"/>
+                  </a:lnTo>
+                  <a:lnTo>
+                    <a:pt x="7682587" y="0"/>
                   </a:lnTo>
                 </a:path>
               </a:pathLst>
@@ -2996,552 +2996,939 @@
         </p:sp>
         <p:sp>
           <p:nvSpPr>
-            <p:cNvPr id="21" name="pg21"/>
+            <p:cNvPr id="21" name="pl21"/>
             <p:cNvSpPr/>
             <p:nvPr/>
           </p:nvSpPr>
           <p:spPr>
             <a:xfrm>
-              <a:off x="915645" y="2209169"/>
-              <a:ext cx="7260303" cy="3149035"/>
+              <a:off x="915645" y="2341296"/>
+              <a:ext cx="7682587" cy="0"/>
             </a:xfrm>
             <a:custGeom>
               <a:avLst/>
               <a:pathLst>
-                <a:path w="7260303" h="3149035">
+                <a:path w="7682587" h="0">
+                  <a:moveTo>
+                    <a:pt x="0" y="0"/>
+                  </a:moveTo>
+                  <a:lnTo>
+                    <a:pt x="7682587" y="0"/>
+                  </a:lnTo>
+                  <a:lnTo>
+                    <a:pt x="7682587" y="0"/>
+                  </a:lnTo>
+                </a:path>
+              </a:pathLst>
+            </a:custGeom>
+            <a:ln w="17246" cap="flat">
+              <a:solidFill>
+                <a:srgbClr val="EBEBEB">
+                  <a:alpha val="100000"/>
+                </a:srgbClr>
+              </a:solidFill>
+              <a:prstDash val="solid"/>
+              <a:round/>
+            </a:ln>
+          </p:spPr>
+          <p:txBody>
+            <a:bodyPr/>
+            <a:lstStyle/>
+            <a:p/>
+          </p:txBody>
+        </p:sp>
+        <p:sp>
+          <p:nvSpPr>
+            <p:cNvPr id="22" name="pl22"/>
+            <p:cNvSpPr/>
+            <p:nvPr/>
+          </p:nvSpPr>
+          <p:spPr>
+            <a:xfrm>
+              <a:off x="1701364" y="2185486"/>
+              <a:ext cx="0" cy="3427824"/>
+            </a:xfrm>
+            <a:custGeom>
+              <a:avLst/>
+              <a:pathLst>
+                <a:path w="0" h="3427824">
+                  <a:moveTo>
+                    <a:pt x="0" y="3427824"/>
+                  </a:moveTo>
+                  <a:lnTo>
+                    <a:pt x="0" y="0"/>
+                  </a:lnTo>
+                  <a:lnTo>
+                    <a:pt x="0" y="0"/>
+                  </a:lnTo>
+                </a:path>
+              </a:pathLst>
+            </a:custGeom>
+            <a:ln w="17246" cap="flat">
+              <a:solidFill>
+                <a:srgbClr val="EBEBEB">
+                  <a:alpha val="100000"/>
+                </a:srgbClr>
+              </a:solidFill>
+              <a:prstDash val="solid"/>
+              <a:round/>
+            </a:ln>
+          </p:spPr>
+          <p:txBody>
+            <a:bodyPr/>
+            <a:lstStyle/>
+            <a:p/>
+          </p:txBody>
+        </p:sp>
+        <p:sp>
+          <p:nvSpPr>
+            <p:cNvPr id="23" name="pl23"/>
+            <p:cNvSpPr/>
+            <p:nvPr/>
+          </p:nvSpPr>
+          <p:spPr>
+            <a:xfrm>
+              <a:off x="2574385" y="2185486"/>
+              <a:ext cx="0" cy="3427824"/>
+            </a:xfrm>
+            <a:custGeom>
+              <a:avLst/>
+              <a:pathLst>
+                <a:path w="0" h="3427824">
+                  <a:moveTo>
+                    <a:pt x="0" y="3427824"/>
+                  </a:moveTo>
+                  <a:lnTo>
+                    <a:pt x="0" y="0"/>
+                  </a:lnTo>
+                  <a:lnTo>
+                    <a:pt x="0" y="0"/>
+                  </a:lnTo>
+                </a:path>
+              </a:pathLst>
+            </a:custGeom>
+            <a:ln w="17246" cap="flat">
+              <a:solidFill>
+                <a:srgbClr val="EBEBEB">
+                  <a:alpha val="100000"/>
+                </a:srgbClr>
+              </a:solidFill>
+              <a:prstDash val="solid"/>
+              <a:round/>
+            </a:ln>
+          </p:spPr>
+          <p:txBody>
+            <a:bodyPr/>
+            <a:lstStyle/>
+            <a:p/>
+          </p:txBody>
+        </p:sp>
+        <p:sp>
+          <p:nvSpPr>
+            <p:cNvPr id="24" name="pl24"/>
+            <p:cNvSpPr/>
+            <p:nvPr/>
+          </p:nvSpPr>
+          <p:spPr>
+            <a:xfrm>
+              <a:off x="3447406" y="2185486"/>
+              <a:ext cx="0" cy="3427824"/>
+            </a:xfrm>
+            <a:custGeom>
+              <a:avLst/>
+              <a:pathLst>
+                <a:path w="0" h="3427824">
+                  <a:moveTo>
+                    <a:pt x="0" y="3427824"/>
+                  </a:moveTo>
+                  <a:lnTo>
+                    <a:pt x="0" y="0"/>
+                  </a:lnTo>
+                  <a:lnTo>
+                    <a:pt x="0" y="0"/>
+                  </a:lnTo>
+                </a:path>
+              </a:pathLst>
+            </a:custGeom>
+            <a:ln w="17246" cap="flat">
+              <a:solidFill>
+                <a:srgbClr val="EBEBEB">
+                  <a:alpha val="100000"/>
+                </a:srgbClr>
+              </a:solidFill>
+              <a:prstDash val="solid"/>
+              <a:round/>
+            </a:ln>
+          </p:spPr>
+          <p:txBody>
+            <a:bodyPr/>
+            <a:lstStyle/>
+            <a:p/>
+          </p:txBody>
+        </p:sp>
+        <p:sp>
+          <p:nvSpPr>
+            <p:cNvPr id="25" name="pl25"/>
+            <p:cNvSpPr/>
+            <p:nvPr/>
+          </p:nvSpPr>
+          <p:spPr>
+            <a:xfrm>
+              <a:off x="4320427" y="2185486"/>
+              <a:ext cx="0" cy="3427824"/>
+            </a:xfrm>
+            <a:custGeom>
+              <a:avLst/>
+              <a:pathLst>
+                <a:path w="0" h="3427824">
+                  <a:moveTo>
+                    <a:pt x="0" y="3427824"/>
+                  </a:moveTo>
+                  <a:lnTo>
+                    <a:pt x="0" y="0"/>
+                  </a:lnTo>
+                  <a:lnTo>
+                    <a:pt x="0" y="0"/>
+                  </a:lnTo>
+                </a:path>
+              </a:pathLst>
+            </a:custGeom>
+            <a:ln w="17246" cap="flat">
+              <a:solidFill>
+                <a:srgbClr val="EBEBEB">
+                  <a:alpha val="100000"/>
+                </a:srgbClr>
+              </a:solidFill>
+              <a:prstDash val="solid"/>
+              <a:round/>
+            </a:ln>
+          </p:spPr>
+          <p:txBody>
+            <a:bodyPr/>
+            <a:lstStyle/>
+            <a:p/>
+          </p:txBody>
+        </p:sp>
+        <p:sp>
+          <p:nvSpPr>
+            <p:cNvPr id="26" name="pl26"/>
+            <p:cNvSpPr/>
+            <p:nvPr/>
+          </p:nvSpPr>
+          <p:spPr>
+            <a:xfrm>
+              <a:off x="5193449" y="2185486"/>
+              <a:ext cx="0" cy="3427824"/>
+            </a:xfrm>
+            <a:custGeom>
+              <a:avLst/>
+              <a:pathLst>
+                <a:path w="0" h="3427824">
+                  <a:moveTo>
+                    <a:pt x="0" y="3427824"/>
+                  </a:moveTo>
+                  <a:lnTo>
+                    <a:pt x="0" y="0"/>
+                  </a:lnTo>
+                  <a:lnTo>
+                    <a:pt x="0" y="0"/>
+                  </a:lnTo>
+                </a:path>
+              </a:pathLst>
+            </a:custGeom>
+            <a:ln w="17246" cap="flat">
+              <a:solidFill>
+                <a:srgbClr val="EBEBEB">
+                  <a:alpha val="100000"/>
+                </a:srgbClr>
+              </a:solidFill>
+              <a:prstDash val="solid"/>
+              <a:round/>
+            </a:ln>
+          </p:spPr>
+          <p:txBody>
+            <a:bodyPr/>
+            <a:lstStyle/>
+            <a:p/>
+          </p:txBody>
+        </p:sp>
+        <p:sp>
+          <p:nvSpPr>
+            <p:cNvPr id="27" name="pl27"/>
+            <p:cNvSpPr/>
+            <p:nvPr/>
+          </p:nvSpPr>
+          <p:spPr>
+            <a:xfrm>
+              <a:off x="6066470" y="2185486"/>
+              <a:ext cx="0" cy="3427824"/>
+            </a:xfrm>
+            <a:custGeom>
+              <a:avLst/>
+              <a:pathLst>
+                <a:path w="0" h="3427824">
+                  <a:moveTo>
+                    <a:pt x="0" y="3427824"/>
+                  </a:moveTo>
+                  <a:lnTo>
+                    <a:pt x="0" y="0"/>
+                  </a:lnTo>
+                  <a:lnTo>
+                    <a:pt x="0" y="0"/>
+                  </a:lnTo>
+                </a:path>
+              </a:pathLst>
+            </a:custGeom>
+            <a:ln w="17246" cap="flat">
+              <a:solidFill>
+                <a:srgbClr val="EBEBEB">
+                  <a:alpha val="100000"/>
+                </a:srgbClr>
+              </a:solidFill>
+              <a:prstDash val="solid"/>
+              <a:round/>
+            </a:ln>
+          </p:spPr>
+          <p:txBody>
+            <a:bodyPr/>
+            <a:lstStyle/>
+            <a:p/>
+          </p:txBody>
+        </p:sp>
+        <p:sp>
+          <p:nvSpPr>
+            <p:cNvPr id="28" name="pl28"/>
+            <p:cNvSpPr/>
+            <p:nvPr/>
+          </p:nvSpPr>
+          <p:spPr>
+            <a:xfrm>
+              <a:off x="6939491" y="2185486"/>
+              <a:ext cx="0" cy="3427824"/>
+            </a:xfrm>
+            <a:custGeom>
+              <a:avLst/>
+              <a:pathLst>
+                <a:path w="0" h="3427824">
+                  <a:moveTo>
+                    <a:pt x="0" y="3427824"/>
+                  </a:moveTo>
+                  <a:lnTo>
+                    <a:pt x="0" y="0"/>
+                  </a:lnTo>
+                  <a:lnTo>
+                    <a:pt x="0" y="0"/>
+                  </a:lnTo>
+                </a:path>
+              </a:pathLst>
+            </a:custGeom>
+            <a:ln w="17246" cap="flat">
+              <a:solidFill>
+                <a:srgbClr val="EBEBEB">
+                  <a:alpha val="100000"/>
+                </a:srgbClr>
+              </a:solidFill>
+              <a:prstDash val="solid"/>
+              <a:round/>
+            </a:ln>
+          </p:spPr>
+          <p:txBody>
+            <a:bodyPr/>
+            <a:lstStyle/>
+            <a:p/>
+          </p:txBody>
+        </p:sp>
+        <p:sp>
+          <p:nvSpPr>
+            <p:cNvPr id="29" name="pl29"/>
+            <p:cNvSpPr/>
+            <p:nvPr/>
+          </p:nvSpPr>
+          <p:spPr>
+            <a:xfrm>
+              <a:off x="7812512" y="2185486"/>
+              <a:ext cx="0" cy="3427824"/>
+            </a:xfrm>
+            <a:custGeom>
+              <a:avLst/>
+              <a:pathLst>
+                <a:path w="0" h="3427824">
+                  <a:moveTo>
+                    <a:pt x="0" y="3427824"/>
+                  </a:moveTo>
+                  <a:lnTo>
+                    <a:pt x="0" y="0"/>
+                  </a:lnTo>
+                  <a:lnTo>
+                    <a:pt x="0" y="0"/>
+                  </a:lnTo>
+                </a:path>
+              </a:pathLst>
+            </a:custGeom>
+            <a:ln w="17246" cap="flat">
+              <a:solidFill>
+                <a:srgbClr val="EBEBEB">
+                  <a:alpha val="100000"/>
+                </a:srgbClr>
+              </a:solidFill>
+              <a:prstDash val="solid"/>
+              <a:round/>
+            </a:ln>
+          </p:spPr>
+          <p:txBody>
+            <a:bodyPr/>
+            <a:lstStyle/>
+            <a:p/>
+          </p:txBody>
+        </p:sp>
+        <p:sp>
+          <p:nvSpPr>
+            <p:cNvPr id="30" name="pg30"/>
+            <p:cNvSpPr/>
+            <p:nvPr/>
+          </p:nvSpPr>
+          <p:spPr>
+            <a:xfrm>
+              <a:off x="915645" y="2185486"/>
+              <a:ext cx="7260303" cy="3208433"/>
+            </a:xfrm>
+            <a:custGeom>
+              <a:avLst/>
+              <a:pathLst>
+                <a:path w="7260303" h="3208433">
                   <a:moveTo>
                     <a:pt x="1087793" y="0"/>
                   </a:moveTo>
                   <a:lnTo>
-                    <a:pt x="1142828" y="111615"/>
-                  </a:lnTo>
-                  <a:lnTo>
-                    <a:pt x="1219297" y="259309"/>
-                  </a:lnTo>
-                  <a:lnTo>
-                    <a:pt x="1295765" y="399966"/>
-                  </a:lnTo>
-                  <a:lnTo>
-                    <a:pt x="1372234" y="533921"/>
-                  </a:lnTo>
-                  <a:lnTo>
-                    <a:pt x="1448702" y="661494"/>
-                  </a:lnTo>
-                  <a:lnTo>
-                    <a:pt x="1525171" y="782989"/>
-                  </a:lnTo>
-                  <a:lnTo>
-                    <a:pt x="1601639" y="898694"/>
-                  </a:lnTo>
-                  <a:lnTo>
-                    <a:pt x="1678107" y="1008887"/>
-                  </a:lnTo>
-                  <a:lnTo>
-                    <a:pt x="1754576" y="1113830"/>
-                  </a:lnTo>
-                  <a:lnTo>
-                    <a:pt x="1831044" y="1213773"/>
-                  </a:lnTo>
-                  <a:lnTo>
-                    <a:pt x="1907513" y="1308953"/>
-                  </a:lnTo>
-                  <a:lnTo>
-                    <a:pt x="1983981" y="1399599"/>
-                  </a:lnTo>
-                  <a:lnTo>
-                    <a:pt x="2060450" y="1485926"/>
-                  </a:lnTo>
-                  <a:lnTo>
-                    <a:pt x="2136918" y="1568140"/>
-                  </a:lnTo>
-                  <a:lnTo>
-                    <a:pt x="2213386" y="1646436"/>
-                  </a:lnTo>
-                  <a:lnTo>
-                    <a:pt x="2289855" y="1721002"/>
-                  </a:lnTo>
-                  <a:lnTo>
-                    <a:pt x="2366323" y="1792016"/>
-                  </a:lnTo>
-                  <a:lnTo>
-                    <a:pt x="2442792" y="1859645"/>
-                  </a:lnTo>
-                  <a:lnTo>
-                    <a:pt x="2519260" y="1924053"/>
-                  </a:lnTo>
-                  <a:lnTo>
-                    <a:pt x="2595729" y="1985392"/>
-                  </a:lnTo>
-                  <a:lnTo>
-                    <a:pt x="2672197" y="2043808"/>
-                  </a:lnTo>
-                  <a:lnTo>
-                    <a:pt x="2748666" y="2099441"/>
-                  </a:lnTo>
-                  <a:lnTo>
-                    <a:pt x="2825134" y="2152423"/>
-                  </a:lnTo>
-                  <a:lnTo>
-                    <a:pt x="2901602" y="2202881"/>
-                  </a:lnTo>
-                  <a:lnTo>
-                    <a:pt x="2978071" y="2250934"/>
-                  </a:lnTo>
-                  <a:lnTo>
-                    <a:pt x="3054539" y="2296699"/>
-                  </a:lnTo>
-                  <a:lnTo>
-                    <a:pt x="3131008" y="2340282"/>
-                  </a:lnTo>
-                  <a:lnTo>
-                    <a:pt x="3207476" y="2381789"/>
-                  </a:lnTo>
-                  <a:lnTo>
-                    <a:pt x="3283945" y="2421319"/>
-                  </a:lnTo>
-                  <a:lnTo>
-                    <a:pt x="3360413" y="2441731"/>
-                  </a:lnTo>
-                  <a:lnTo>
-                    <a:pt x="3436881" y="2426045"/>
-                  </a:lnTo>
-                  <a:lnTo>
-                    <a:pt x="3513350" y="2410039"/>
-                  </a:lnTo>
-                  <a:lnTo>
-                    <a:pt x="3589818" y="2393707"/>
-                  </a:lnTo>
-                  <a:lnTo>
-                    <a:pt x="3666287" y="2377042"/>
-                  </a:lnTo>
-                  <a:lnTo>
-                    <a:pt x="3742755" y="2360037"/>
-                  </a:lnTo>
-                  <a:lnTo>
-                    <a:pt x="3819224" y="2342686"/>
-                  </a:lnTo>
-                  <a:lnTo>
-                    <a:pt x="3895692" y="2324982"/>
-                  </a:lnTo>
-                  <a:lnTo>
-                    <a:pt x="3972160" y="2306916"/>
-                  </a:lnTo>
-                  <a:lnTo>
-                    <a:pt x="4048629" y="2288482"/>
-                  </a:lnTo>
-                  <a:lnTo>
-                    <a:pt x="4125097" y="2269673"/>
-                  </a:lnTo>
-                  <a:lnTo>
-                    <a:pt x="4201566" y="2250481"/>
-                  </a:lnTo>
-                  <a:lnTo>
-                    <a:pt x="4278034" y="2230897"/>
-                  </a:lnTo>
-                  <a:lnTo>
-                    <a:pt x="4354503" y="2210914"/>
-                  </a:lnTo>
-                  <a:lnTo>
-                    <a:pt x="4430971" y="2190524"/>
-                  </a:lnTo>
-                  <a:lnTo>
-                    <a:pt x="4507439" y="2169718"/>
-                  </a:lnTo>
-                  <a:lnTo>
-                    <a:pt x="4583908" y="2148489"/>
-                  </a:lnTo>
-                  <a:lnTo>
-                    <a:pt x="4660376" y="2126826"/>
-                  </a:lnTo>
-                  <a:lnTo>
-                    <a:pt x="4736845" y="2104722"/>
-                  </a:lnTo>
-                  <a:lnTo>
-                    <a:pt x="4813313" y="2082168"/>
-                  </a:lnTo>
-                  <a:lnTo>
-                    <a:pt x="4889782" y="2059154"/>
-                  </a:lnTo>
-                  <a:lnTo>
-                    <a:pt x="4966250" y="2035672"/>
-                  </a:lnTo>
-                  <a:lnTo>
-                    <a:pt x="5042719" y="2011710"/>
-                  </a:lnTo>
-                  <a:lnTo>
-                    <a:pt x="5119187" y="1987260"/>
-                  </a:lnTo>
-                  <a:lnTo>
-                    <a:pt x="5195655" y="1962312"/>
-                  </a:lnTo>
-                  <a:lnTo>
-                    <a:pt x="5272124" y="1936856"/>
-                  </a:lnTo>
-                  <a:lnTo>
-                    <a:pt x="5348592" y="1910881"/>
-                  </a:lnTo>
-                  <a:lnTo>
-                    <a:pt x="5425061" y="1884376"/>
-                  </a:lnTo>
-                  <a:lnTo>
-                    <a:pt x="5501529" y="1857331"/>
-                  </a:lnTo>
-                  <a:lnTo>
-                    <a:pt x="5577998" y="1829735"/>
-                  </a:lnTo>
-                  <a:lnTo>
-                    <a:pt x="5654466" y="1801577"/>
-                  </a:lnTo>
-                  <a:lnTo>
-                    <a:pt x="5730934" y="1772845"/>
-                  </a:lnTo>
-                  <a:lnTo>
-                    <a:pt x="5807403" y="1743527"/>
-                  </a:lnTo>
-                  <a:lnTo>
-                    <a:pt x="5883871" y="1713612"/>
-                  </a:lnTo>
-                  <a:lnTo>
-                    <a:pt x="5960340" y="1683087"/>
-                  </a:lnTo>
-                  <a:lnTo>
-                    <a:pt x="6036808" y="1651941"/>
-                  </a:lnTo>
-                  <a:lnTo>
-                    <a:pt x="6113277" y="1620159"/>
-                  </a:lnTo>
-                  <a:lnTo>
-                    <a:pt x="6189745" y="1587730"/>
-                  </a:lnTo>
-                  <a:lnTo>
-                    <a:pt x="6266213" y="1554639"/>
-                  </a:lnTo>
-                  <a:lnTo>
-                    <a:pt x="6342682" y="1520875"/>
-                  </a:lnTo>
-                  <a:lnTo>
-                    <a:pt x="6419150" y="1486422"/>
-                  </a:lnTo>
-                  <a:lnTo>
-                    <a:pt x="6495619" y="1451267"/>
-                  </a:lnTo>
-                  <a:lnTo>
-                    <a:pt x="6572087" y="1415396"/>
-                  </a:lnTo>
-                  <a:lnTo>
-                    <a:pt x="6648556" y="1378794"/>
-                  </a:lnTo>
-                  <a:lnTo>
-                    <a:pt x="6725024" y="1341446"/>
-                  </a:lnTo>
-                  <a:lnTo>
-                    <a:pt x="6801492" y="1303336"/>
-                  </a:lnTo>
-                  <a:lnTo>
-                    <a:pt x="6877961" y="1264450"/>
-                  </a:lnTo>
-                  <a:lnTo>
-                    <a:pt x="6954429" y="1224772"/>
-                  </a:lnTo>
-                  <a:lnTo>
-                    <a:pt x="7030898" y="1184285"/>
-                  </a:lnTo>
-                  <a:lnTo>
-                    <a:pt x="7107366" y="1142973"/>
-                  </a:lnTo>
-                  <a:lnTo>
-                    <a:pt x="7183835" y="1100819"/>
-                  </a:lnTo>
-                  <a:lnTo>
-                    <a:pt x="7260303" y="1057805"/>
-                  </a:lnTo>
-                  <a:lnTo>
-                    <a:pt x="7260303" y="3149035"/>
-                  </a:lnTo>
-                  <a:lnTo>
-                    <a:pt x="7183835" y="3145913"/>
-                  </a:lnTo>
-                  <a:lnTo>
-                    <a:pt x="7107366" y="3142635"/>
-                  </a:lnTo>
-                  <a:lnTo>
-                    <a:pt x="7030898" y="3139193"/>
-                  </a:lnTo>
-                  <a:lnTo>
-                    <a:pt x="6954429" y="3135578"/>
-                  </a:lnTo>
-                  <a:lnTo>
-                    <a:pt x="6877961" y="3131783"/>
-                  </a:lnTo>
-                  <a:lnTo>
-                    <a:pt x="6801492" y="3127798"/>
-                  </a:lnTo>
-                  <a:lnTo>
-                    <a:pt x="6725024" y="3123613"/>
-                  </a:lnTo>
-                  <a:lnTo>
-                    <a:pt x="6648556" y="3119219"/>
-                  </a:lnTo>
-                  <a:lnTo>
-                    <a:pt x="6572087" y="3114606"/>
-                  </a:lnTo>
-                  <a:lnTo>
-                    <a:pt x="6495619" y="3109761"/>
-                  </a:lnTo>
-                  <a:lnTo>
-                    <a:pt x="6419150" y="3104674"/>
-                  </a:lnTo>
-                  <a:lnTo>
-                    <a:pt x="6342682" y="3099333"/>
-                  </a:lnTo>
-                  <a:lnTo>
-                    <a:pt x="6266213" y="3093724"/>
-                  </a:lnTo>
-                  <a:lnTo>
-                    <a:pt x="6189745" y="3087835"/>
-                  </a:lnTo>
-                  <a:lnTo>
-                    <a:pt x="6113277" y="3081651"/>
-                  </a:lnTo>
-                  <a:lnTo>
-                    <a:pt x="6036808" y="3075158"/>
-                  </a:lnTo>
-                  <a:lnTo>
-                    <a:pt x="5960340" y="3068340"/>
-                  </a:lnTo>
-                  <a:lnTo>
-                    <a:pt x="5883871" y="3061180"/>
-                  </a:lnTo>
-                  <a:lnTo>
-                    <a:pt x="5807403" y="3053663"/>
-                  </a:lnTo>
-                  <a:lnTo>
-                    <a:pt x="5730934" y="3045769"/>
-                  </a:lnTo>
-                  <a:lnTo>
-                    <a:pt x="5654466" y="3037481"/>
-                  </a:lnTo>
-                  <a:lnTo>
-                    <a:pt x="5577998" y="3028778"/>
-                  </a:lnTo>
-                  <a:lnTo>
-                    <a:pt x="5501529" y="3019640"/>
-                  </a:lnTo>
-                  <a:lnTo>
-                    <a:pt x="5425061" y="3010044"/>
-                  </a:lnTo>
-                  <a:lnTo>
-                    <a:pt x="5348592" y="2999968"/>
-                  </a:lnTo>
-                  <a:lnTo>
-                    <a:pt x="5272124" y="2989388"/>
-                  </a:lnTo>
-                  <a:lnTo>
-                    <a:pt x="5195655" y="2978279"/>
-                  </a:lnTo>
-                  <a:lnTo>
-                    <a:pt x="5119187" y="2966614"/>
-                  </a:lnTo>
-                  <a:lnTo>
-                    <a:pt x="5042719" y="2954366"/>
-                  </a:lnTo>
-                  <a:lnTo>
-                    <a:pt x="4966250" y="2941504"/>
-                  </a:lnTo>
-                  <a:lnTo>
-                    <a:pt x="4889782" y="2928000"/>
-                  </a:lnTo>
-                  <a:lnTo>
-                    <a:pt x="4813313" y="2913819"/>
-                  </a:lnTo>
-                  <a:lnTo>
-                    <a:pt x="4736845" y="2898929"/>
-                  </a:lnTo>
-                  <a:lnTo>
-                    <a:pt x="4660376" y="2883295"/>
-                  </a:lnTo>
-                  <a:lnTo>
-                    <a:pt x="4583908" y="2866878"/>
-                  </a:lnTo>
-                  <a:lnTo>
-                    <a:pt x="4507439" y="2849639"/>
-                  </a:lnTo>
-                  <a:lnTo>
-                    <a:pt x="4430971" y="2831539"/>
-                  </a:lnTo>
-                  <a:lnTo>
-                    <a:pt x="4354503" y="2812532"/>
-                  </a:lnTo>
-                  <a:lnTo>
-                    <a:pt x="4278034" y="2792575"/>
-                  </a:lnTo>
-                  <a:lnTo>
-                    <a:pt x="4201566" y="2771620"/>
-                  </a:lnTo>
-                  <a:lnTo>
-                    <a:pt x="4125097" y="2749616"/>
-                  </a:lnTo>
-                  <a:lnTo>
-                    <a:pt x="4048629" y="2726511"/>
-                  </a:lnTo>
-                  <a:lnTo>
-                    <a:pt x="3972160" y="2702250"/>
-                  </a:lnTo>
-                  <a:lnTo>
-                    <a:pt x="3895692" y="2676775"/>
-                  </a:lnTo>
-                  <a:lnTo>
-                    <a:pt x="3819224" y="2650026"/>
-                  </a:lnTo>
-                  <a:lnTo>
-                    <a:pt x="3742755" y="2621939"/>
-                  </a:lnTo>
-                  <a:lnTo>
-                    <a:pt x="3666287" y="2592447"/>
-                  </a:lnTo>
-                  <a:lnTo>
-                    <a:pt x="3589818" y="2561479"/>
-                  </a:lnTo>
-                  <a:lnTo>
-                    <a:pt x="3513350" y="2528961"/>
-                  </a:lnTo>
-                  <a:lnTo>
-                    <a:pt x="3436881" y="2494817"/>
-                  </a:lnTo>
-                  <a:lnTo>
-                    <a:pt x="3360413" y="2458965"/>
-                  </a:lnTo>
-                  <a:lnTo>
-                    <a:pt x="3283945" y="2457104"/>
-                  </a:lnTo>
-                  <a:lnTo>
-                    <a:pt x="3207476" y="2472170"/>
-                  </a:lnTo>
-                  <a:lnTo>
-                    <a:pt x="3131008" y="2486934"/>
-                  </a:lnTo>
-                  <a:lnTo>
-                    <a:pt x="3054539" y="2501405"/>
-                  </a:lnTo>
-                  <a:lnTo>
-                    <a:pt x="2978071" y="2515586"/>
-                  </a:lnTo>
-                  <a:lnTo>
-                    <a:pt x="2901602" y="2529483"/>
-                  </a:lnTo>
-                  <a:lnTo>
-                    <a:pt x="2825134" y="2543104"/>
-                  </a:lnTo>
-                  <a:lnTo>
-                    <a:pt x="2748666" y="2556452"/>
-                  </a:lnTo>
-                  <a:lnTo>
-                    <a:pt x="2672197" y="2569534"/>
-                  </a:lnTo>
-                  <a:lnTo>
-                    <a:pt x="2595729" y="2582354"/>
-                  </a:lnTo>
-                  <a:lnTo>
-                    <a:pt x="2519260" y="2594918"/>
-                  </a:lnTo>
-                  <a:lnTo>
-                    <a:pt x="2442792" y="2607232"/>
-                  </a:lnTo>
-                  <a:lnTo>
-                    <a:pt x="2366323" y="2619299"/>
-                  </a:lnTo>
-                  <a:lnTo>
-                    <a:pt x="2289855" y="2631126"/>
-                  </a:lnTo>
-                  <a:lnTo>
-                    <a:pt x="2213386" y="2642716"/>
-                  </a:lnTo>
-                  <a:lnTo>
-                    <a:pt x="2136918" y="2654075"/>
-                  </a:lnTo>
-                  <a:lnTo>
-                    <a:pt x="2060450" y="2665206"/>
-                  </a:lnTo>
-                  <a:lnTo>
-                    <a:pt x="1983981" y="2676116"/>
-                  </a:lnTo>
-                  <a:lnTo>
-                    <a:pt x="1907513" y="2686808"/>
-                  </a:lnTo>
-                  <a:lnTo>
-                    <a:pt x="1831044" y="2697286"/>
-                  </a:lnTo>
-                  <a:lnTo>
-                    <a:pt x="1754576" y="2707555"/>
-                  </a:lnTo>
-                  <a:lnTo>
-                    <a:pt x="1678107" y="2717618"/>
-                  </a:lnTo>
-                  <a:lnTo>
-                    <a:pt x="1601639" y="2727481"/>
-                  </a:lnTo>
-                  <a:lnTo>
-                    <a:pt x="1525171" y="2737147"/>
-                  </a:lnTo>
-                  <a:lnTo>
-                    <a:pt x="1448702" y="2746620"/>
-                  </a:lnTo>
-                  <a:lnTo>
-                    <a:pt x="1372234" y="2755903"/>
-                  </a:lnTo>
-                  <a:lnTo>
-                    <a:pt x="1295765" y="2765001"/>
-                  </a:lnTo>
-                  <a:lnTo>
-                    <a:pt x="1219297" y="2773918"/>
-                  </a:lnTo>
-                  <a:lnTo>
-                    <a:pt x="1142828" y="2782656"/>
-                  </a:lnTo>
-                  <a:lnTo>
-                    <a:pt x="1066360" y="2791220"/>
-                  </a:lnTo>
-                  <a:lnTo>
-                    <a:pt x="989892" y="2799613"/>
-                  </a:lnTo>
-                  <a:lnTo>
-                    <a:pt x="913423" y="2807838"/>
-                  </a:lnTo>
-                  <a:lnTo>
-                    <a:pt x="836955" y="2815899"/>
-                  </a:lnTo>
-                  <a:lnTo>
-                    <a:pt x="760486" y="2823799"/>
-                  </a:lnTo>
-                  <a:lnTo>
-                    <a:pt x="684018" y="2831541"/>
-                  </a:lnTo>
-                  <a:lnTo>
-                    <a:pt x="607549" y="2839128"/>
-                  </a:lnTo>
-                  <a:lnTo>
-                    <a:pt x="531081" y="2846564"/>
-                  </a:lnTo>
-                  <a:lnTo>
-                    <a:pt x="454613" y="2853852"/>
-                  </a:lnTo>
-                  <a:lnTo>
-                    <a:pt x="378144" y="2860993"/>
-                  </a:lnTo>
-                  <a:lnTo>
-                    <a:pt x="301676" y="2867993"/>
-                  </a:lnTo>
-                  <a:lnTo>
-                    <a:pt x="225207" y="2874852"/>
-                  </a:lnTo>
-                  <a:lnTo>
-                    <a:pt x="148739" y="2881575"/>
-                  </a:lnTo>
-                  <a:lnTo>
-                    <a:pt x="72270" y="2888163"/>
-                  </a:lnTo>
-                  <a:lnTo>
-                    <a:pt x="0" y="2894265"/>
+                    <a:pt x="1142828" y="113720"/>
+                  </a:lnTo>
+                  <a:lnTo>
+                    <a:pt x="1219297" y="264200"/>
+                  </a:lnTo>
+                  <a:lnTo>
+                    <a:pt x="1295765" y="407510"/>
+                  </a:lnTo>
+                  <a:lnTo>
+                    <a:pt x="1372234" y="543992"/>
+                  </a:lnTo>
+                  <a:lnTo>
+                    <a:pt x="1448702" y="673971"/>
+                  </a:lnTo>
+                  <a:lnTo>
+                    <a:pt x="1525171" y="797758"/>
+                  </a:lnTo>
+                  <a:lnTo>
+                    <a:pt x="1601639" y="915646"/>
+                  </a:lnTo>
+                  <a:lnTo>
+                    <a:pt x="1678107" y="1027917"/>
+                  </a:lnTo>
+                  <a:lnTo>
+                    <a:pt x="1754576" y="1134839"/>
+                  </a:lnTo>
+                  <a:lnTo>
+                    <a:pt x="1831044" y="1236667"/>
+                  </a:lnTo>
+                  <a:lnTo>
+                    <a:pt x="1907513" y="1333643"/>
+                  </a:lnTo>
+                  <a:lnTo>
+                    <a:pt x="1983981" y="1425999"/>
+                  </a:lnTo>
+                  <a:lnTo>
+                    <a:pt x="2060450" y="1513954"/>
+                  </a:lnTo>
+                  <a:lnTo>
+                    <a:pt x="2136918" y="1597718"/>
+                  </a:lnTo>
+                  <a:lnTo>
+                    <a:pt x="2213386" y="1677492"/>
+                  </a:lnTo>
+                  <a:lnTo>
+                    <a:pt x="2289855" y="1753464"/>
+                  </a:lnTo>
+                  <a:lnTo>
+                    <a:pt x="2366323" y="1825817"/>
+                  </a:lnTo>
+                  <a:lnTo>
+                    <a:pt x="2442792" y="1894722"/>
+                  </a:lnTo>
+                  <a:lnTo>
+                    <a:pt x="2519260" y="1960345"/>
+                  </a:lnTo>
+                  <a:lnTo>
+                    <a:pt x="2595729" y="2022840"/>
+                  </a:lnTo>
+                  <a:lnTo>
+                    <a:pt x="2672197" y="2082358"/>
+                  </a:lnTo>
+                  <a:lnTo>
+                    <a:pt x="2748666" y="2139041"/>
+                  </a:lnTo>
+                  <a:lnTo>
+                    <a:pt x="2825134" y="2193022"/>
+                  </a:lnTo>
+                  <a:lnTo>
+                    <a:pt x="2901602" y="2244432"/>
+                  </a:lnTo>
+                  <a:lnTo>
+                    <a:pt x="2978071" y="2293392"/>
+                  </a:lnTo>
+                  <a:lnTo>
+                    <a:pt x="3054539" y="2340019"/>
+                  </a:lnTo>
+                  <a:lnTo>
+                    <a:pt x="3131008" y="2384425"/>
+                  </a:lnTo>
+                  <a:lnTo>
+                    <a:pt x="3207476" y="2426715"/>
+                  </a:lnTo>
+                  <a:lnTo>
+                    <a:pt x="3283945" y="2466990"/>
+                  </a:lnTo>
+                  <a:lnTo>
+                    <a:pt x="3360413" y="2487787"/>
+                  </a:lnTo>
+                  <a:lnTo>
+                    <a:pt x="3436881" y="2471805"/>
+                  </a:lnTo>
+                  <a:lnTo>
+                    <a:pt x="3513350" y="2455497"/>
+                  </a:lnTo>
+                  <a:lnTo>
+                    <a:pt x="3589818" y="2438857"/>
+                  </a:lnTo>
+                  <a:lnTo>
+                    <a:pt x="3666287" y="2421878"/>
+                  </a:lnTo>
+                  <a:lnTo>
+                    <a:pt x="3742755" y="2404553"/>
+                  </a:lnTo>
+                  <a:lnTo>
+                    <a:pt x="3819224" y="2386874"/>
+                  </a:lnTo>
+                  <a:lnTo>
+                    <a:pt x="3895692" y="2368836"/>
+                  </a:lnTo>
+                  <a:lnTo>
+                    <a:pt x="3972160" y="2350430"/>
+                  </a:lnTo>
+                  <a:lnTo>
+                    <a:pt x="4048629" y="2331648"/>
+                  </a:lnTo>
+                  <a:lnTo>
+                    <a:pt x="4125097" y="2312484"/>
+                  </a:lnTo>
+                  <a:lnTo>
+                    <a:pt x="4201566" y="2292930"/>
+                  </a:lnTo>
+                  <a:lnTo>
+                    <a:pt x="4278034" y="2272976"/>
+                  </a:lnTo>
+                  <a:lnTo>
+                    <a:pt x="4354503" y="2252617"/>
+                  </a:lnTo>
+                  <a:lnTo>
+                    <a:pt x="4430971" y="2231842"/>
+                  </a:lnTo>
+                  <a:lnTo>
+                    <a:pt x="4507439" y="2210644"/>
+                  </a:lnTo>
+                  <a:lnTo>
+                    <a:pt x="4583908" y="2189014"/>
+                  </a:lnTo>
+                  <a:lnTo>
+                    <a:pt x="4660376" y="2166943"/>
+                  </a:lnTo>
+                  <a:lnTo>
+                    <a:pt x="4736845" y="2144422"/>
+                  </a:lnTo>
+                  <a:lnTo>
+                    <a:pt x="4813313" y="2121443"/>
+                  </a:lnTo>
+                  <a:lnTo>
+                    <a:pt x="4889782" y="2097995"/>
+                  </a:lnTo>
+                  <a:lnTo>
+                    <a:pt x="4966250" y="2074069"/>
+                  </a:lnTo>
+                  <a:lnTo>
+                    <a:pt x="5042719" y="2049655"/>
+                  </a:lnTo>
+                  <a:lnTo>
+                    <a:pt x="5119187" y="2024745"/>
+                  </a:lnTo>
+                  <a:lnTo>
+                    <a:pt x="5195655" y="1999326"/>
+                  </a:lnTo>
+                  <a:lnTo>
+                    <a:pt x="5272124" y="1973389"/>
+                  </a:lnTo>
+                  <a:lnTo>
+                    <a:pt x="5348592" y="1946924"/>
+                  </a:lnTo>
+                  <a:lnTo>
+                    <a:pt x="5425061" y="1919920"/>
+                  </a:lnTo>
+                  <a:lnTo>
+                    <a:pt x="5501529" y="1892365"/>
+                  </a:lnTo>
+                  <a:lnTo>
+                    <a:pt x="5577998" y="1864248"/>
+                  </a:lnTo>
+                  <a:lnTo>
+                    <a:pt x="5654466" y="1835559"/>
+                  </a:lnTo>
+                  <a:lnTo>
+                    <a:pt x="5730934" y="1806285"/>
+                  </a:lnTo>
+                  <a:lnTo>
+                    <a:pt x="5807403" y="1776414"/>
+                  </a:lnTo>
+                  <a:lnTo>
+                    <a:pt x="5883871" y="1745935"/>
+                  </a:lnTo>
+                  <a:lnTo>
+                    <a:pt x="5960340" y="1714834"/>
+                  </a:lnTo>
+                  <a:lnTo>
+                    <a:pt x="6036808" y="1683100"/>
+                  </a:lnTo>
+                  <a:lnTo>
+                    <a:pt x="6113277" y="1650719"/>
+                  </a:lnTo>
+                  <a:lnTo>
+                    <a:pt x="6189745" y="1617678"/>
+                  </a:lnTo>
+                  <a:lnTo>
+                    <a:pt x="6266213" y="1583963"/>
+                  </a:lnTo>
+                  <a:lnTo>
+                    <a:pt x="6342682" y="1549562"/>
+                  </a:lnTo>
+                  <a:lnTo>
+                    <a:pt x="6419150" y="1514459"/>
+                  </a:lnTo>
+                  <a:lnTo>
+                    <a:pt x="6495619" y="1478641"/>
+                  </a:lnTo>
+                  <a:lnTo>
+                    <a:pt x="6572087" y="1442094"/>
+                  </a:lnTo>
+                  <a:lnTo>
+                    <a:pt x="6648556" y="1404801"/>
+                  </a:lnTo>
+                  <a:lnTo>
+                    <a:pt x="6725024" y="1366748"/>
+                  </a:lnTo>
+                  <a:lnTo>
+                    <a:pt x="6801492" y="1327920"/>
+                  </a:lnTo>
+                  <a:lnTo>
+                    <a:pt x="6877961" y="1288301"/>
+                  </a:lnTo>
+                  <a:lnTo>
+                    <a:pt x="6954429" y="1247874"/>
+                  </a:lnTo>
+                  <a:lnTo>
+                    <a:pt x="7030898" y="1206623"/>
+                  </a:lnTo>
+                  <a:lnTo>
+                    <a:pt x="7107366" y="1164532"/>
+                  </a:lnTo>
+                  <a:lnTo>
+                    <a:pt x="7183835" y="1121582"/>
+                  </a:lnTo>
+                  <a:lnTo>
+                    <a:pt x="7260303" y="1077758"/>
+                  </a:lnTo>
+                  <a:lnTo>
+                    <a:pt x="7260303" y="3208433"/>
+                  </a:lnTo>
+                  <a:lnTo>
+                    <a:pt x="7183835" y="3205252"/>
+                  </a:lnTo>
+                  <a:lnTo>
+                    <a:pt x="7107366" y="3201912"/>
+                  </a:lnTo>
+                  <a:lnTo>
+                    <a:pt x="7030898" y="3198405"/>
+                  </a:lnTo>
+                  <a:lnTo>
+                    <a:pt x="6954429" y="3194722"/>
+                  </a:lnTo>
+                  <a:lnTo>
+                    <a:pt x="6877961" y="3190855"/>
+                  </a:lnTo>
+                  <a:lnTo>
+                    <a:pt x="6801492" y="3186795"/>
+                  </a:lnTo>
+                  <a:lnTo>
+                    <a:pt x="6725024" y="3182531"/>
+                  </a:lnTo>
+                  <a:lnTo>
+                    <a:pt x="6648556" y="3178055"/>
+                  </a:lnTo>
+                  <a:lnTo>
+                    <a:pt x="6572087" y="3173354"/>
+                  </a:lnTo>
+                  <a:lnTo>
+                    <a:pt x="6495619" y="3168418"/>
+                  </a:lnTo>
+                  <a:lnTo>
+                    <a:pt x="6419150" y="3163235"/>
+                  </a:lnTo>
+                  <a:lnTo>
+                    <a:pt x="6342682" y="3157793"/>
+                  </a:lnTo>
+                  <a:lnTo>
+                    <a:pt x="6266213" y="3152079"/>
+                  </a:lnTo>
+                  <a:lnTo>
+                    <a:pt x="6189745" y="3146078"/>
+                  </a:lnTo>
+                  <a:lnTo>
+                    <a:pt x="6113277" y="3139778"/>
+                  </a:lnTo>
+                  <a:lnTo>
+                    <a:pt x="6036808" y="3133162"/>
+                  </a:lnTo>
+                  <a:lnTo>
+                    <a:pt x="5960340" y="3126215"/>
+                  </a:lnTo>
+                  <a:lnTo>
+                    <a:pt x="5883871" y="3118921"/>
+                  </a:lnTo>
+                  <a:lnTo>
+                    <a:pt x="5807403" y="3111262"/>
+                  </a:lnTo>
+                  <a:lnTo>
+                    <a:pt x="5730934" y="3103219"/>
+                  </a:lnTo>
+                  <a:lnTo>
+                    <a:pt x="5654466" y="3094775"/>
+                  </a:lnTo>
+                  <a:lnTo>
+                    <a:pt x="5577998" y="3085907"/>
+                  </a:lnTo>
+                  <a:lnTo>
+                    <a:pt x="5501529" y="3076597"/>
+                  </a:lnTo>
+                  <a:lnTo>
+                    <a:pt x="5425061" y="3066820"/>
+                  </a:lnTo>
+                  <a:lnTo>
+                    <a:pt x="5348592" y="3056554"/>
+                  </a:lnTo>
+                  <a:lnTo>
+                    <a:pt x="5272124" y="3045775"/>
+                  </a:lnTo>
+                  <a:lnTo>
+                    <a:pt x="5195655" y="3034456"/>
+                  </a:lnTo>
+                  <a:lnTo>
+                    <a:pt x="5119187" y="3022571"/>
+                  </a:lnTo>
+                  <a:lnTo>
+                    <a:pt x="5042719" y="3010092"/>
+                  </a:lnTo>
+                  <a:lnTo>
+                    <a:pt x="4966250" y="2996988"/>
+                  </a:lnTo>
+                  <a:lnTo>
+                    <a:pt x="4889782" y="2983228"/>
+                  </a:lnTo>
+                  <a:lnTo>
+                    <a:pt x="4813313" y="2968780"/>
+                  </a:lnTo>
+                  <a:lnTo>
+                    <a:pt x="4736845" y="2953610"/>
+                  </a:lnTo>
+                  <a:lnTo>
+                    <a:pt x="4660376" y="2937680"/>
+                  </a:lnTo>
+                  <a:lnTo>
+                    <a:pt x="4583908" y="2920953"/>
+                  </a:lnTo>
+                  <a:lnTo>
+                    <a:pt x="4507439" y="2903390"/>
+                  </a:lnTo>
+                  <a:lnTo>
+                    <a:pt x="4430971" y="2884948"/>
+                  </a:lnTo>
+                  <a:lnTo>
+                    <a:pt x="4354503" y="2865583"/>
+                  </a:lnTo>
+                  <a:lnTo>
+                    <a:pt x="4278034" y="2845249"/>
+                  </a:lnTo>
+                  <a:lnTo>
+                    <a:pt x="4201566" y="2823899"/>
+                  </a:lnTo>
+                  <a:lnTo>
+                    <a:pt x="4125097" y="2801480"/>
+                  </a:lnTo>
+                  <a:lnTo>
+                    <a:pt x="4048629" y="2777939"/>
+                  </a:lnTo>
+                  <a:lnTo>
+                    <a:pt x="3972160" y="2753220"/>
+                  </a:lnTo>
+                  <a:lnTo>
+                    <a:pt x="3895692" y="2727265"/>
+                  </a:lnTo>
+                  <a:lnTo>
+                    <a:pt x="3819224" y="2700012"/>
+                  </a:lnTo>
+                  <a:lnTo>
+                    <a:pt x="3742755" y="2671395"/>
+                  </a:lnTo>
+                  <a:lnTo>
+                    <a:pt x="3666287" y="2641346"/>
+                  </a:lnTo>
+                  <a:lnTo>
+                    <a:pt x="3589818" y="2609794"/>
+                  </a:lnTo>
+                  <a:lnTo>
+                    <a:pt x="3513350" y="2576663"/>
+                  </a:lnTo>
+                  <a:lnTo>
+                    <a:pt x="3436881" y="2541875"/>
+                  </a:lnTo>
+                  <a:lnTo>
+                    <a:pt x="3360413" y="2505346"/>
+                  </a:lnTo>
+                  <a:lnTo>
+                    <a:pt x="3283945" y="2503450"/>
+                  </a:lnTo>
+                  <a:lnTo>
+                    <a:pt x="3207476" y="2518800"/>
+                  </a:lnTo>
+                  <a:lnTo>
+                    <a:pt x="3131008" y="2533844"/>
+                  </a:lnTo>
+                  <a:lnTo>
+                    <a:pt x="3054539" y="2548587"/>
+                  </a:lnTo>
+                  <a:lnTo>
+                    <a:pt x="2978071" y="2563035"/>
+                  </a:lnTo>
+                  <a:lnTo>
+                    <a:pt x="2901602" y="2577195"/>
+                  </a:lnTo>
+                  <a:lnTo>
+                    <a:pt x="2825134" y="2591072"/>
+                  </a:lnTo>
+                  <a:lnTo>
+                    <a:pt x="2748666" y="2604672"/>
+                  </a:lnTo>
+                  <a:lnTo>
+                    <a:pt x="2672197" y="2618001"/>
+                  </a:lnTo>
+                  <a:lnTo>
+                    <a:pt x="2595729" y="2631063"/>
+                  </a:lnTo>
+                  <a:lnTo>
+                    <a:pt x="2519260" y="2643864"/>
+                  </a:lnTo>
+                  <a:lnTo>
+                    <a:pt x="2442792" y="2656410"/>
+                  </a:lnTo>
+                  <a:lnTo>
+                    <a:pt x="2366323" y="2668705"/>
+                  </a:lnTo>
+                  <a:lnTo>
+                    <a:pt x="2289855" y="2680754"/>
+                  </a:lnTo>
+                  <a:lnTo>
+                    <a:pt x="2213386" y="2692563"/>
+                  </a:lnTo>
+                  <a:lnTo>
+                    <a:pt x="2136918" y="2704136"/>
+                  </a:lnTo>
+                  <a:lnTo>
+                    <a:pt x="2060450" y="2715478"/>
+                  </a:lnTo>
+                  <a:lnTo>
+                    <a:pt x="1983981" y="2726593"/>
+                  </a:lnTo>
+                  <a:lnTo>
+                    <a:pt x="1907513" y="2737487"/>
+                  </a:lnTo>
+                  <a:lnTo>
+                    <a:pt x="1831044" y="2748163"/>
+                  </a:lnTo>
+                  <a:lnTo>
+                    <a:pt x="1754576" y="2758625"/>
+                  </a:lnTo>
+                  <a:lnTo>
+                    <a:pt x="1678107" y="2768879"/>
+                  </a:lnTo>
+                  <a:lnTo>
+                    <a:pt x="1601639" y="2778928"/>
+                  </a:lnTo>
+                  <a:lnTo>
+                    <a:pt x="1525171" y="2788776"/>
+                  </a:lnTo>
+                  <a:lnTo>
+                    <a:pt x="1448702" y="2798427"/>
+                  </a:lnTo>
+                  <a:lnTo>
+                    <a:pt x="1372234" y="2807886"/>
+                  </a:lnTo>
+                  <a:lnTo>
+                    <a:pt x="1295765" y="2817155"/>
+                  </a:lnTo>
+                  <a:lnTo>
+                    <a:pt x="1219297" y="2826240"/>
+                  </a:lnTo>
+                  <a:lnTo>
+                    <a:pt x="1142828" y="2835143"/>
+                  </a:lnTo>
+                  <a:lnTo>
+                    <a:pt x="1066360" y="2843869"/>
+                  </a:lnTo>
+                  <a:lnTo>
+                    <a:pt x="989892" y="2852420"/>
+                  </a:lnTo>
+                  <a:lnTo>
+                    <a:pt x="913423" y="2860800"/>
+                  </a:lnTo>
+                  <a:lnTo>
+                    <a:pt x="836955" y="2869013"/>
+                  </a:lnTo>
+                  <a:lnTo>
+                    <a:pt x="760486" y="2877062"/>
+                  </a:lnTo>
+                  <a:lnTo>
+                    <a:pt x="684018" y="2884950"/>
+                  </a:lnTo>
+                  <a:lnTo>
+                    <a:pt x="607549" y="2892680"/>
+                  </a:lnTo>
+                  <a:lnTo>
+                    <a:pt x="531081" y="2900257"/>
+                  </a:lnTo>
+                  <a:lnTo>
+                    <a:pt x="454613" y="2907682"/>
+                  </a:lnTo>
+                  <a:lnTo>
+                    <a:pt x="378144" y="2914958"/>
+                  </a:lnTo>
+                  <a:lnTo>
+                    <a:pt x="301676" y="2922089"/>
+                  </a:lnTo>
+                  <a:lnTo>
+                    <a:pt x="225207" y="2929078"/>
+                  </a:lnTo>
+                  <a:lnTo>
+                    <a:pt x="148739" y="2935927"/>
+                  </a:lnTo>
+                  <a:lnTo>
+                    <a:pt x="72270" y="2942640"/>
+                  </a:lnTo>
+                  <a:lnTo>
+                    <a:pt x="0" y="2948857"/>
                   </a:lnTo>
                   <a:close/>
                 </a:path>
@@ -3561,264 +3948,264 @@
         </p:sp>
         <p:sp>
           <p:nvSpPr>
-            <p:cNvPr id="22" name="pl22"/>
+            <p:cNvPr id="31" name="pl31"/>
             <p:cNvSpPr/>
             <p:nvPr/>
           </p:nvSpPr>
           <p:spPr>
             <a:xfrm>
-              <a:off x="2003438" y="2209169"/>
-              <a:ext cx="6172509" cy="2441731"/>
+              <a:off x="2003438" y="2185486"/>
+              <a:ext cx="6172509" cy="2487787"/>
             </a:xfrm>
             <a:custGeom>
               <a:avLst/>
               <a:pathLst>
-                <a:path w="6172509" h="2441731">
+                <a:path w="6172509" h="2487787">
                   <a:moveTo>
                     <a:pt x="0" y="0"/>
                   </a:moveTo>
                   <a:lnTo>
-                    <a:pt x="55035" y="111615"/>
-                  </a:lnTo>
-                  <a:lnTo>
-                    <a:pt x="131503" y="259309"/>
-                  </a:lnTo>
-                  <a:lnTo>
-                    <a:pt x="207972" y="399966"/>
-                  </a:lnTo>
-                  <a:lnTo>
-                    <a:pt x="284440" y="533921"/>
-                  </a:lnTo>
-                  <a:lnTo>
-                    <a:pt x="360909" y="661494"/>
-                  </a:lnTo>
-                  <a:lnTo>
-                    <a:pt x="437377" y="782989"/>
-                  </a:lnTo>
-                  <a:lnTo>
-                    <a:pt x="513845" y="898694"/>
-                  </a:lnTo>
-                  <a:lnTo>
-                    <a:pt x="590314" y="1008887"/>
-                  </a:lnTo>
-                  <a:lnTo>
-                    <a:pt x="666782" y="1113830"/>
-                  </a:lnTo>
-                  <a:lnTo>
-                    <a:pt x="743251" y="1213773"/>
-                  </a:lnTo>
-                  <a:lnTo>
-                    <a:pt x="819719" y="1308953"/>
-                  </a:lnTo>
-                  <a:lnTo>
-                    <a:pt x="896188" y="1399599"/>
-                  </a:lnTo>
-                  <a:lnTo>
-                    <a:pt x="972656" y="1485926"/>
-                  </a:lnTo>
-                  <a:lnTo>
-                    <a:pt x="1049124" y="1568140"/>
-                  </a:lnTo>
-                  <a:lnTo>
-                    <a:pt x="1125593" y="1646436"/>
-                  </a:lnTo>
-                  <a:lnTo>
-                    <a:pt x="1202061" y="1721002"/>
-                  </a:lnTo>
-                  <a:lnTo>
-                    <a:pt x="1278530" y="1792016"/>
-                  </a:lnTo>
-                  <a:lnTo>
-                    <a:pt x="1354998" y="1859645"/>
-                  </a:lnTo>
-                  <a:lnTo>
-                    <a:pt x="1431467" y="1924053"/>
-                  </a:lnTo>
-                  <a:lnTo>
-                    <a:pt x="1507935" y="1985392"/>
-                  </a:lnTo>
-                  <a:lnTo>
-                    <a:pt x="1584403" y="2043808"/>
-                  </a:lnTo>
-                  <a:lnTo>
-                    <a:pt x="1660872" y="2099441"/>
-                  </a:lnTo>
-                  <a:lnTo>
-                    <a:pt x="1737340" y="2152423"/>
-                  </a:lnTo>
-                  <a:lnTo>
-                    <a:pt x="1813809" y="2202881"/>
-                  </a:lnTo>
-                  <a:lnTo>
-                    <a:pt x="1890277" y="2250934"/>
-                  </a:lnTo>
-                  <a:lnTo>
-                    <a:pt x="1966746" y="2296699"/>
-                  </a:lnTo>
-                  <a:lnTo>
-                    <a:pt x="2043214" y="2340282"/>
-                  </a:lnTo>
-                  <a:lnTo>
-                    <a:pt x="2119683" y="2381789"/>
-                  </a:lnTo>
-                  <a:lnTo>
-                    <a:pt x="2196151" y="2421319"/>
-                  </a:lnTo>
-                  <a:lnTo>
-                    <a:pt x="2272619" y="2441731"/>
-                  </a:lnTo>
-                  <a:lnTo>
-                    <a:pt x="2349088" y="2426045"/>
-                  </a:lnTo>
-                  <a:lnTo>
-                    <a:pt x="2425556" y="2410039"/>
-                  </a:lnTo>
-                  <a:lnTo>
-                    <a:pt x="2502025" y="2393707"/>
-                  </a:lnTo>
-                  <a:lnTo>
-                    <a:pt x="2578493" y="2377042"/>
-                  </a:lnTo>
-                  <a:lnTo>
-                    <a:pt x="2654962" y="2360037"/>
-                  </a:lnTo>
-                  <a:lnTo>
-                    <a:pt x="2731430" y="2342686"/>
-                  </a:lnTo>
-                  <a:lnTo>
-                    <a:pt x="2807898" y="2324982"/>
-                  </a:lnTo>
-                  <a:lnTo>
-                    <a:pt x="2884367" y="2306916"/>
-                  </a:lnTo>
-                  <a:lnTo>
-                    <a:pt x="2960835" y="2288482"/>
-                  </a:lnTo>
-                  <a:lnTo>
-                    <a:pt x="3037304" y="2269673"/>
-                  </a:lnTo>
-                  <a:lnTo>
-                    <a:pt x="3113772" y="2250481"/>
-                  </a:lnTo>
-                  <a:lnTo>
-                    <a:pt x="3190241" y="2230897"/>
-                  </a:lnTo>
-                  <a:lnTo>
-                    <a:pt x="3266709" y="2210914"/>
-                  </a:lnTo>
-                  <a:lnTo>
-                    <a:pt x="3343177" y="2190524"/>
-                  </a:lnTo>
-                  <a:lnTo>
-                    <a:pt x="3419646" y="2169718"/>
-                  </a:lnTo>
-                  <a:lnTo>
-                    <a:pt x="3496114" y="2148489"/>
-                  </a:lnTo>
-                  <a:lnTo>
-                    <a:pt x="3572583" y="2126826"/>
-                  </a:lnTo>
-                  <a:lnTo>
-                    <a:pt x="3649051" y="2104722"/>
-                  </a:lnTo>
-                  <a:lnTo>
-                    <a:pt x="3725520" y="2082168"/>
-                  </a:lnTo>
-                  <a:lnTo>
-                    <a:pt x="3801988" y="2059154"/>
-                  </a:lnTo>
-                  <a:lnTo>
-                    <a:pt x="3878456" y="2035672"/>
-                  </a:lnTo>
-                  <a:lnTo>
-                    <a:pt x="3954925" y="2011710"/>
-                  </a:lnTo>
-                  <a:lnTo>
-                    <a:pt x="4031393" y="1987260"/>
-                  </a:lnTo>
-                  <a:lnTo>
-                    <a:pt x="4107862" y="1962312"/>
-                  </a:lnTo>
-                  <a:lnTo>
-                    <a:pt x="4184330" y="1936856"/>
-                  </a:lnTo>
-                  <a:lnTo>
-                    <a:pt x="4260799" y="1910881"/>
-                  </a:lnTo>
-                  <a:lnTo>
-                    <a:pt x="4337267" y="1884376"/>
-                  </a:lnTo>
-                  <a:lnTo>
-                    <a:pt x="4413736" y="1857331"/>
-                  </a:lnTo>
-                  <a:lnTo>
-                    <a:pt x="4490204" y="1829735"/>
-                  </a:lnTo>
-                  <a:lnTo>
-                    <a:pt x="4566672" y="1801577"/>
-                  </a:lnTo>
-                  <a:lnTo>
-                    <a:pt x="4643141" y="1772845"/>
-                  </a:lnTo>
-                  <a:lnTo>
-                    <a:pt x="4719609" y="1743527"/>
-                  </a:lnTo>
-                  <a:lnTo>
-                    <a:pt x="4796078" y="1713612"/>
-                  </a:lnTo>
-                  <a:lnTo>
-                    <a:pt x="4872546" y="1683087"/>
-                  </a:lnTo>
-                  <a:lnTo>
-                    <a:pt x="4949015" y="1651941"/>
-                  </a:lnTo>
-                  <a:lnTo>
-                    <a:pt x="5025483" y="1620159"/>
-                  </a:lnTo>
-                  <a:lnTo>
-                    <a:pt x="5101951" y="1587730"/>
-                  </a:lnTo>
-                  <a:lnTo>
-                    <a:pt x="5178420" y="1554639"/>
-                  </a:lnTo>
-                  <a:lnTo>
-                    <a:pt x="5254888" y="1520875"/>
-                  </a:lnTo>
-                  <a:lnTo>
-                    <a:pt x="5331357" y="1486422"/>
-                  </a:lnTo>
-                  <a:lnTo>
-                    <a:pt x="5407825" y="1451267"/>
-                  </a:lnTo>
-                  <a:lnTo>
-                    <a:pt x="5484294" y="1415396"/>
-                  </a:lnTo>
-                  <a:lnTo>
-                    <a:pt x="5560762" y="1378794"/>
-                  </a:lnTo>
-                  <a:lnTo>
-                    <a:pt x="5637230" y="1341446"/>
-                  </a:lnTo>
-                  <a:lnTo>
-                    <a:pt x="5713699" y="1303336"/>
-                  </a:lnTo>
-                  <a:lnTo>
-                    <a:pt x="5790167" y="1264450"/>
-                  </a:lnTo>
-                  <a:lnTo>
-                    <a:pt x="5866636" y="1224772"/>
-                  </a:lnTo>
-                  <a:lnTo>
-                    <a:pt x="5943104" y="1184285"/>
-                  </a:lnTo>
-                  <a:lnTo>
-                    <a:pt x="6019573" y="1142973"/>
-                  </a:lnTo>
-                  <a:lnTo>
-                    <a:pt x="6096041" y="1100819"/>
-                  </a:lnTo>
-                  <a:lnTo>
-                    <a:pt x="6172509" y="1057805"/>
+                    <a:pt x="55035" y="113720"/>
+                  </a:lnTo>
+                  <a:lnTo>
+                    <a:pt x="131503" y="264200"/>
+                  </a:lnTo>
+                  <a:lnTo>
+                    <a:pt x="207972" y="407510"/>
+                  </a:lnTo>
+                  <a:lnTo>
+                    <a:pt x="284440" y="543992"/>
+                  </a:lnTo>
+                  <a:lnTo>
+                    <a:pt x="360909" y="673971"/>
+                  </a:lnTo>
+                  <a:lnTo>
+                    <a:pt x="437377" y="797758"/>
+                  </a:lnTo>
+                  <a:lnTo>
+                    <a:pt x="513845" y="915646"/>
+                  </a:lnTo>
+                  <a:lnTo>
+                    <a:pt x="590314" y="1027917"/>
+                  </a:lnTo>
+                  <a:lnTo>
+                    <a:pt x="666782" y="1134839"/>
+                  </a:lnTo>
+                  <a:lnTo>
+                    <a:pt x="743251" y="1236667"/>
+                  </a:lnTo>
+                  <a:lnTo>
+                    <a:pt x="819719" y="1333643"/>
+                  </a:lnTo>
+                  <a:lnTo>
+                    <a:pt x="896188" y="1425999"/>
+                  </a:lnTo>
+                  <a:lnTo>
+                    <a:pt x="972656" y="1513954"/>
+                  </a:lnTo>
+                  <a:lnTo>
+                    <a:pt x="1049124" y="1597718"/>
+                  </a:lnTo>
+                  <a:lnTo>
+                    <a:pt x="1125593" y="1677492"/>
+                  </a:lnTo>
+                  <a:lnTo>
+                    <a:pt x="1202061" y="1753464"/>
+                  </a:lnTo>
+                  <a:lnTo>
+                    <a:pt x="1278530" y="1825817"/>
+                  </a:lnTo>
+                  <a:lnTo>
+                    <a:pt x="1354998" y="1894722"/>
+                  </a:lnTo>
+                  <a:lnTo>
+                    <a:pt x="1431467" y="1960345"/>
+                  </a:lnTo>
+                  <a:lnTo>
+                    <a:pt x="1507935" y="2022840"/>
+                  </a:lnTo>
+                  <a:lnTo>
+                    <a:pt x="1584403" y="2082358"/>
+                  </a:lnTo>
+                  <a:lnTo>
+                    <a:pt x="1660872" y="2139041"/>
+                  </a:lnTo>
+                  <a:lnTo>
+                    <a:pt x="1737340" y="2193022"/>
+                  </a:lnTo>
+                  <a:lnTo>
+                    <a:pt x="1813809" y="2244432"/>
+                  </a:lnTo>
+                  <a:lnTo>
+                    <a:pt x="1890277" y="2293392"/>
+                  </a:lnTo>
+                  <a:lnTo>
+                    <a:pt x="1966746" y="2340019"/>
+                  </a:lnTo>
+                  <a:lnTo>
+                    <a:pt x="2043214" y="2384425"/>
+                  </a:lnTo>
+                  <a:lnTo>
+                    <a:pt x="2119683" y="2426715"/>
+                  </a:lnTo>
+                  <a:lnTo>
+                    <a:pt x="2196151" y="2466990"/>
+                  </a:lnTo>
+                  <a:lnTo>
+                    <a:pt x="2272619" y="2487787"/>
+                  </a:lnTo>
+                  <a:lnTo>
+                    <a:pt x="2349088" y="2471805"/>
+                  </a:lnTo>
+                  <a:lnTo>
+                    <a:pt x="2425556" y="2455497"/>
+                  </a:lnTo>
+                  <a:lnTo>
+                    <a:pt x="2502025" y="2438857"/>
+                  </a:lnTo>
+                  <a:lnTo>
+                    <a:pt x="2578493" y="2421878"/>
+                  </a:lnTo>
+                  <a:lnTo>
+                    <a:pt x="2654962" y="2404553"/>
+                  </a:lnTo>
+                  <a:lnTo>
+                    <a:pt x="2731430" y="2386874"/>
+                  </a:lnTo>
+                  <a:lnTo>
+                    <a:pt x="2807898" y="2368836"/>
+                  </a:lnTo>
+                  <a:lnTo>
+                    <a:pt x="2884367" y="2350430"/>
+                  </a:lnTo>
+                  <a:lnTo>
+                    <a:pt x="2960835" y="2331648"/>
+                  </a:lnTo>
+                  <a:lnTo>
+                    <a:pt x="3037304" y="2312484"/>
+                  </a:lnTo>
+                  <a:lnTo>
+                    <a:pt x="3113772" y="2292930"/>
+                  </a:lnTo>
+                  <a:lnTo>
+                    <a:pt x="3190241" y="2272976"/>
+                  </a:lnTo>
+                  <a:lnTo>
+                    <a:pt x="3266709" y="2252617"/>
+                  </a:lnTo>
+                  <a:lnTo>
+                    <a:pt x="3343177" y="2231842"/>
+                  </a:lnTo>
+                  <a:lnTo>
+                    <a:pt x="3419646" y="2210644"/>
+                  </a:lnTo>
+                  <a:lnTo>
+                    <a:pt x="3496114" y="2189014"/>
+                  </a:lnTo>
+                  <a:lnTo>
+                    <a:pt x="3572583" y="2166943"/>
+                  </a:lnTo>
+                  <a:lnTo>
+                    <a:pt x="3649051" y="2144422"/>
+                  </a:lnTo>
+                  <a:lnTo>
+                    <a:pt x="3725520" y="2121443"/>
+                  </a:lnTo>
+                  <a:lnTo>
+                    <a:pt x="3801988" y="2097995"/>
+                  </a:lnTo>
+                  <a:lnTo>
+                    <a:pt x="3878456" y="2074069"/>
+                  </a:lnTo>
+                  <a:lnTo>
+                    <a:pt x="3954925" y="2049655"/>
+                  </a:lnTo>
+                  <a:lnTo>
+                    <a:pt x="4031393" y="2024745"/>
+                  </a:lnTo>
+                  <a:lnTo>
+                    <a:pt x="4107862" y="1999326"/>
+                  </a:lnTo>
+                  <a:lnTo>
+                    <a:pt x="4184330" y="1973389"/>
+                  </a:lnTo>
+                  <a:lnTo>
+                    <a:pt x="4260799" y="1946924"/>
+                  </a:lnTo>
+                  <a:lnTo>
+                    <a:pt x="4337267" y="1919920"/>
+                  </a:lnTo>
+                  <a:lnTo>
+                    <a:pt x="4413736" y="1892365"/>
+                  </a:lnTo>
+                  <a:lnTo>
+                    <a:pt x="4490204" y="1864248"/>
+                  </a:lnTo>
+                  <a:lnTo>
+                    <a:pt x="4566672" y="1835559"/>
+                  </a:lnTo>
+                  <a:lnTo>
+                    <a:pt x="4643141" y="1806285"/>
+                  </a:lnTo>
+                  <a:lnTo>
+                    <a:pt x="4719609" y="1776414"/>
+                  </a:lnTo>
+                  <a:lnTo>
+                    <a:pt x="4796078" y="1745935"/>
+                  </a:lnTo>
+                  <a:lnTo>
+                    <a:pt x="4872546" y="1714834"/>
+                  </a:lnTo>
+                  <a:lnTo>
+                    <a:pt x="4949015" y="1683100"/>
+                  </a:lnTo>
+                  <a:lnTo>
+                    <a:pt x="5025483" y="1650719"/>
+                  </a:lnTo>
+                  <a:lnTo>
+                    <a:pt x="5101951" y="1617678"/>
+                  </a:lnTo>
+                  <a:lnTo>
+                    <a:pt x="5178420" y="1583963"/>
+                  </a:lnTo>
+                  <a:lnTo>
+                    <a:pt x="5254888" y="1549562"/>
+                  </a:lnTo>
+                  <a:lnTo>
+                    <a:pt x="5331357" y="1514459"/>
+                  </a:lnTo>
+                  <a:lnTo>
+                    <a:pt x="5407825" y="1478641"/>
+                  </a:lnTo>
+                  <a:lnTo>
+                    <a:pt x="5484294" y="1442094"/>
+                  </a:lnTo>
+                  <a:lnTo>
+                    <a:pt x="5560762" y="1404801"/>
+                  </a:lnTo>
+                  <a:lnTo>
+                    <a:pt x="5637230" y="1366748"/>
+                  </a:lnTo>
+                  <a:lnTo>
+                    <a:pt x="5713699" y="1327920"/>
+                  </a:lnTo>
+                  <a:lnTo>
+                    <a:pt x="5790167" y="1288301"/>
+                  </a:lnTo>
+                  <a:lnTo>
+                    <a:pt x="5866636" y="1247874"/>
+                  </a:lnTo>
+                  <a:lnTo>
+                    <a:pt x="5943104" y="1206623"/>
+                  </a:lnTo>
+                  <a:lnTo>
+                    <a:pt x="6019573" y="1164532"/>
+                  </a:lnTo>
+                  <a:lnTo>
+                    <a:pt x="6096041" y="1121582"/>
+                  </a:lnTo>
+                  <a:lnTo>
+                    <a:pt x="6172509" y="1077758"/>
                   </a:lnTo>
                 </a:path>
               </a:pathLst>
@@ -3832,306 +4219,306 @@
         </p:sp>
         <p:sp>
           <p:nvSpPr>
-            <p:cNvPr id="23" name="pl23"/>
+            <p:cNvPr id="32" name="pl32"/>
             <p:cNvSpPr/>
             <p:nvPr/>
           </p:nvSpPr>
           <p:spPr>
             <a:xfrm>
-              <a:off x="915645" y="4666273"/>
-              <a:ext cx="7260303" cy="691931"/>
+              <a:off x="915645" y="4688936"/>
+              <a:ext cx="7260303" cy="704982"/>
             </a:xfrm>
             <a:custGeom>
               <a:avLst/>
               <a:pathLst>
-                <a:path w="7260303" h="691931">
+                <a:path w="7260303" h="704982">
                   <a:moveTo>
-                    <a:pt x="7260303" y="691931"/>
+                    <a:pt x="7260303" y="704982"/>
                   </a:moveTo>
                   <a:lnTo>
-                    <a:pt x="7183835" y="688809"/>
-                  </a:lnTo>
-                  <a:lnTo>
-                    <a:pt x="7107366" y="685531"/>
-                  </a:lnTo>
-                  <a:lnTo>
-                    <a:pt x="7030898" y="682089"/>
-                  </a:lnTo>
-                  <a:lnTo>
-                    <a:pt x="6954429" y="678474"/>
-                  </a:lnTo>
-                  <a:lnTo>
-                    <a:pt x="6877961" y="674679"/>
-                  </a:lnTo>
-                  <a:lnTo>
-                    <a:pt x="6801492" y="670694"/>
-                  </a:lnTo>
-                  <a:lnTo>
-                    <a:pt x="6725024" y="666509"/>
-                  </a:lnTo>
-                  <a:lnTo>
-                    <a:pt x="6648556" y="662115"/>
-                  </a:lnTo>
-                  <a:lnTo>
-                    <a:pt x="6572087" y="657501"/>
-                  </a:lnTo>
-                  <a:lnTo>
-                    <a:pt x="6495619" y="652657"/>
-                  </a:lnTo>
-                  <a:lnTo>
-                    <a:pt x="6419150" y="647570"/>
-                  </a:lnTo>
-                  <a:lnTo>
-                    <a:pt x="6342682" y="642229"/>
-                  </a:lnTo>
-                  <a:lnTo>
-                    <a:pt x="6266213" y="636620"/>
-                  </a:lnTo>
-                  <a:lnTo>
-                    <a:pt x="6189745" y="630731"/>
-                  </a:lnTo>
-                  <a:lnTo>
-                    <a:pt x="6113277" y="624547"/>
-                  </a:lnTo>
-                  <a:lnTo>
-                    <a:pt x="6036808" y="618054"/>
-                  </a:lnTo>
-                  <a:lnTo>
-                    <a:pt x="5960340" y="611235"/>
-                  </a:lnTo>
-                  <a:lnTo>
-                    <a:pt x="5883871" y="604076"/>
-                  </a:lnTo>
-                  <a:lnTo>
-                    <a:pt x="5807403" y="596559"/>
-                  </a:lnTo>
-                  <a:lnTo>
-                    <a:pt x="5730934" y="588665"/>
-                  </a:lnTo>
-                  <a:lnTo>
-                    <a:pt x="5654466" y="580377"/>
-                  </a:lnTo>
-                  <a:lnTo>
-                    <a:pt x="5577998" y="571674"/>
-                  </a:lnTo>
-                  <a:lnTo>
-                    <a:pt x="5501529" y="562535"/>
-                  </a:lnTo>
-                  <a:lnTo>
-                    <a:pt x="5425061" y="552940"/>
-                  </a:lnTo>
-                  <a:lnTo>
-                    <a:pt x="5348592" y="542864"/>
-                  </a:lnTo>
-                  <a:lnTo>
-                    <a:pt x="5272124" y="532284"/>
-                  </a:lnTo>
-                  <a:lnTo>
-                    <a:pt x="5195655" y="521175"/>
-                  </a:lnTo>
-                  <a:lnTo>
-                    <a:pt x="5119187" y="509510"/>
-                  </a:lnTo>
-                  <a:lnTo>
-                    <a:pt x="5042719" y="497262"/>
-                  </a:lnTo>
-                  <a:lnTo>
-                    <a:pt x="4966250" y="484400"/>
-                  </a:lnTo>
-                  <a:lnTo>
-                    <a:pt x="4889782" y="470896"/>
-                  </a:lnTo>
-                  <a:lnTo>
-                    <a:pt x="4813313" y="456715"/>
-                  </a:lnTo>
-                  <a:lnTo>
-                    <a:pt x="4736845" y="441825"/>
-                  </a:lnTo>
-                  <a:lnTo>
-                    <a:pt x="4660376" y="426191"/>
-                  </a:lnTo>
-                  <a:lnTo>
-                    <a:pt x="4583908" y="409774"/>
-                  </a:lnTo>
-                  <a:lnTo>
-                    <a:pt x="4507439" y="392535"/>
-                  </a:lnTo>
-                  <a:lnTo>
-                    <a:pt x="4430971" y="374435"/>
-                  </a:lnTo>
-                  <a:lnTo>
-                    <a:pt x="4354503" y="355428"/>
-                  </a:lnTo>
-                  <a:lnTo>
-                    <a:pt x="4278034" y="335471"/>
-                  </a:lnTo>
-                  <a:lnTo>
-                    <a:pt x="4201566" y="314516"/>
-                  </a:lnTo>
-                  <a:lnTo>
-                    <a:pt x="4125097" y="292512"/>
-                  </a:lnTo>
-                  <a:lnTo>
-                    <a:pt x="4048629" y="269407"/>
-                  </a:lnTo>
-                  <a:lnTo>
-                    <a:pt x="3972160" y="245146"/>
-                  </a:lnTo>
-                  <a:lnTo>
-                    <a:pt x="3895692" y="219671"/>
-                  </a:lnTo>
-                  <a:lnTo>
-                    <a:pt x="3819224" y="192922"/>
-                  </a:lnTo>
-                  <a:lnTo>
-                    <a:pt x="3742755" y="164835"/>
-                  </a:lnTo>
-                  <a:lnTo>
-                    <a:pt x="3666287" y="135342"/>
-                  </a:lnTo>
-                  <a:lnTo>
-                    <a:pt x="3589818" y="104375"/>
-                  </a:lnTo>
-                  <a:lnTo>
-                    <a:pt x="3513350" y="71857"/>
-                  </a:lnTo>
-                  <a:lnTo>
-                    <a:pt x="3436881" y="37713"/>
-                  </a:lnTo>
-                  <a:lnTo>
-                    <a:pt x="3360413" y="1861"/>
+                    <a:pt x="7183835" y="701802"/>
+                  </a:lnTo>
+                  <a:lnTo>
+                    <a:pt x="7107366" y="698461"/>
+                  </a:lnTo>
+                  <a:lnTo>
+                    <a:pt x="7030898" y="694954"/>
+                  </a:lnTo>
+                  <a:lnTo>
+                    <a:pt x="6954429" y="691272"/>
+                  </a:lnTo>
+                  <a:lnTo>
+                    <a:pt x="6877961" y="687405"/>
+                  </a:lnTo>
+                  <a:lnTo>
+                    <a:pt x="6801492" y="683344"/>
+                  </a:lnTo>
+                  <a:lnTo>
+                    <a:pt x="6725024" y="679081"/>
+                  </a:lnTo>
+                  <a:lnTo>
+                    <a:pt x="6648556" y="674604"/>
+                  </a:lnTo>
+                  <a:lnTo>
+                    <a:pt x="6572087" y="669903"/>
+                  </a:lnTo>
+                  <a:lnTo>
+                    <a:pt x="6495619" y="664967"/>
+                  </a:lnTo>
+                  <a:lnTo>
+                    <a:pt x="6419150" y="659785"/>
+                  </a:lnTo>
+                  <a:lnTo>
+                    <a:pt x="6342682" y="654342"/>
+                  </a:lnTo>
+                  <a:lnTo>
+                    <a:pt x="6266213" y="648628"/>
+                  </a:lnTo>
+                  <a:lnTo>
+                    <a:pt x="6189745" y="642628"/>
+                  </a:lnTo>
+                  <a:lnTo>
+                    <a:pt x="6113277" y="636327"/>
+                  </a:lnTo>
+                  <a:lnTo>
+                    <a:pt x="6036808" y="629711"/>
+                  </a:lnTo>
+                  <a:lnTo>
+                    <a:pt x="5960340" y="622765"/>
+                  </a:lnTo>
+                  <a:lnTo>
+                    <a:pt x="5883871" y="615470"/>
+                  </a:lnTo>
+                  <a:lnTo>
+                    <a:pt x="5807403" y="607811"/>
+                  </a:lnTo>
+                  <a:lnTo>
+                    <a:pt x="5730934" y="599769"/>
+                  </a:lnTo>
+                  <a:lnTo>
+                    <a:pt x="5654466" y="591324"/>
+                  </a:lnTo>
+                  <a:lnTo>
+                    <a:pt x="5577998" y="582457"/>
+                  </a:lnTo>
+                  <a:lnTo>
+                    <a:pt x="5501529" y="573146"/>
+                  </a:lnTo>
+                  <a:lnTo>
+                    <a:pt x="5425061" y="563369"/>
+                  </a:lnTo>
+                  <a:lnTo>
+                    <a:pt x="5348592" y="553104"/>
+                  </a:lnTo>
+                  <a:lnTo>
+                    <a:pt x="5272124" y="542324"/>
+                  </a:lnTo>
+                  <a:lnTo>
+                    <a:pt x="5195655" y="531006"/>
+                  </a:lnTo>
+                  <a:lnTo>
+                    <a:pt x="5119187" y="519121"/>
+                  </a:lnTo>
+                  <a:lnTo>
+                    <a:pt x="5042719" y="506641"/>
+                  </a:lnTo>
+                  <a:lnTo>
+                    <a:pt x="4966250" y="493537"/>
+                  </a:lnTo>
+                  <a:lnTo>
+                    <a:pt x="4889782" y="479778"/>
+                  </a:lnTo>
+                  <a:lnTo>
+                    <a:pt x="4813313" y="465330"/>
+                  </a:lnTo>
+                  <a:lnTo>
+                    <a:pt x="4736845" y="450159"/>
+                  </a:lnTo>
+                  <a:lnTo>
+                    <a:pt x="4660376" y="434229"/>
+                  </a:lnTo>
+                  <a:lnTo>
+                    <a:pt x="4583908" y="417503"/>
+                  </a:lnTo>
+                  <a:lnTo>
+                    <a:pt x="4507439" y="399939"/>
+                  </a:lnTo>
+                  <a:lnTo>
+                    <a:pt x="4430971" y="381497"/>
+                  </a:lnTo>
+                  <a:lnTo>
+                    <a:pt x="4354503" y="362133"/>
+                  </a:lnTo>
+                  <a:lnTo>
+                    <a:pt x="4278034" y="341799"/>
+                  </a:lnTo>
+                  <a:lnTo>
+                    <a:pt x="4201566" y="320448"/>
+                  </a:lnTo>
+                  <a:lnTo>
+                    <a:pt x="4125097" y="298029"/>
+                  </a:lnTo>
+                  <a:lnTo>
+                    <a:pt x="4048629" y="274488"/>
+                  </a:lnTo>
+                  <a:lnTo>
+                    <a:pt x="3972160" y="249770"/>
+                  </a:lnTo>
+                  <a:lnTo>
+                    <a:pt x="3895692" y="223815"/>
+                  </a:lnTo>
+                  <a:lnTo>
+                    <a:pt x="3819224" y="196561"/>
+                  </a:lnTo>
+                  <a:lnTo>
+                    <a:pt x="3742755" y="167944"/>
+                  </a:lnTo>
+                  <a:lnTo>
+                    <a:pt x="3666287" y="137895"/>
+                  </a:lnTo>
+                  <a:lnTo>
+                    <a:pt x="3589818" y="106343"/>
+                  </a:lnTo>
+                  <a:lnTo>
+                    <a:pt x="3513350" y="73213"/>
+                  </a:lnTo>
+                  <a:lnTo>
+                    <a:pt x="3436881" y="38424"/>
+                  </a:lnTo>
+                  <a:lnTo>
+                    <a:pt x="3360413" y="1896"/>
                   </a:lnTo>
                   <a:lnTo>
                     <a:pt x="3283945" y="0"/>
                   </a:lnTo>
                   <a:lnTo>
-                    <a:pt x="3207476" y="15065"/>
-                  </a:lnTo>
-                  <a:lnTo>
-                    <a:pt x="3131008" y="29830"/>
-                  </a:lnTo>
-                  <a:lnTo>
-                    <a:pt x="3054539" y="44300"/>
-                  </a:lnTo>
-                  <a:lnTo>
-                    <a:pt x="2978071" y="58481"/>
-                  </a:lnTo>
-                  <a:lnTo>
-                    <a:pt x="2901602" y="72379"/>
-                  </a:lnTo>
-                  <a:lnTo>
-                    <a:pt x="2825134" y="86000"/>
-                  </a:lnTo>
-                  <a:lnTo>
-                    <a:pt x="2748666" y="99348"/>
-                  </a:lnTo>
-                  <a:lnTo>
-                    <a:pt x="2672197" y="112429"/>
-                  </a:lnTo>
-                  <a:lnTo>
-                    <a:pt x="2595729" y="125250"/>
-                  </a:lnTo>
-                  <a:lnTo>
-                    <a:pt x="2519260" y="137814"/>
-                  </a:lnTo>
-                  <a:lnTo>
-                    <a:pt x="2442792" y="150128"/>
-                  </a:lnTo>
-                  <a:lnTo>
-                    <a:pt x="2366323" y="162195"/>
-                  </a:lnTo>
-                  <a:lnTo>
-                    <a:pt x="2289855" y="174021"/>
-                  </a:lnTo>
-                  <a:lnTo>
-                    <a:pt x="2213386" y="185612"/>
-                  </a:lnTo>
-                  <a:lnTo>
-                    <a:pt x="2136918" y="196970"/>
-                  </a:lnTo>
-                  <a:lnTo>
-                    <a:pt x="2060450" y="208102"/>
-                  </a:lnTo>
-                  <a:lnTo>
-                    <a:pt x="1983981" y="219012"/>
-                  </a:lnTo>
-                  <a:lnTo>
-                    <a:pt x="1907513" y="229704"/>
-                  </a:lnTo>
-                  <a:lnTo>
-                    <a:pt x="1831044" y="240182"/>
-                  </a:lnTo>
-                  <a:lnTo>
-                    <a:pt x="1754576" y="250451"/>
-                  </a:lnTo>
-                  <a:lnTo>
-                    <a:pt x="1678107" y="260514"/>
-                  </a:lnTo>
-                  <a:lnTo>
-                    <a:pt x="1601639" y="270377"/>
-                  </a:lnTo>
-                  <a:lnTo>
-                    <a:pt x="1525171" y="280043"/>
-                  </a:lnTo>
-                  <a:lnTo>
-                    <a:pt x="1448702" y="289516"/>
-                  </a:lnTo>
-                  <a:lnTo>
-                    <a:pt x="1372234" y="298799"/>
-                  </a:lnTo>
-                  <a:lnTo>
-                    <a:pt x="1295765" y="307897"/>
-                  </a:lnTo>
-                  <a:lnTo>
-                    <a:pt x="1219297" y="316814"/>
-                  </a:lnTo>
-                  <a:lnTo>
-                    <a:pt x="1142828" y="325552"/>
-                  </a:lnTo>
-                  <a:lnTo>
-                    <a:pt x="1066360" y="334116"/>
-                  </a:lnTo>
-                  <a:lnTo>
-                    <a:pt x="989892" y="342509"/>
-                  </a:lnTo>
-                  <a:lnTo>
-                    <a:pt x="913423" y="350734"/>
-                  </a:lnTo>
-                  <a:lnTo>
-                    <a:pt x="836955" y="358795"/>
-                  </a:lnTo>
-                  <a:lnTo>
-                    <a:pt x="760486" y="366695"/>
-                  </a:lnTo>
-                  <a:lnTo>
-                    <a:pt x="684018" y="374437"/>
-                  </a:lnTo>
-                  <a:lnTo>
-                    <a:pt x="607549" y="382024"/>
-                  </a:lnTo>
-                  <a:lnTo>
-                    <a:pt x="531081" y="389460"/>
-                  </a:lnTo>
-                  <a:lnTo>
-                    <a:pt x="454613" y="396747"/>
-                  </a:lnTo>
-                  <a:lnTo>
-                    <a:pt x="378144" y="403889"/>
-                  </a:lnTo>
-                  <a:lnTo>
-                    <a:pt x="301676" y="410889"/>
-                  </a:lnTo>
-                  <a:lnTo>
-                    <a:pt x="225207" y="417748"/>
-                  </a:lnTo>
-                  <a:lnTo>
-                    <a:pt x="148739" y="424470"/>
-                  </a:lnTo>
-                  <a:lnTo>
-                    <a:pt x="72270" y="431059"/>
-                  </a:lnTo>
-                  <a:lnTo>
-                    <a:pt x="0" y="437161"/>
+                    <a:pt x="3207476" y="15350"/>
+                  </a:lnTo>
+                  <a:lnTo>
+                    <a:pt x="3131008" y="30393"/>
+                  </a:lnTo>
+                  <a:lnTo>
+                    <a:pt x="3054539" y="45136"/>
+                  </a:lnTo>
+                  <a:lnTo>
+                    <a:pt x="2978071" y="59585"/>
+                  </a:lnTo>
+                  <a:lnTo>
+                    <a:pt x="2901602" y="73745"/>
+                  </a:lnTo>
+                  <a:lnTo>
+                    <a:pt x="2825134" y="87622"/>
+                  </a:lnTo>
+                  <a:lnTo>
+                    <a:pt x="2748666" y="101222"/>
+                  </a:lnTo>
+                  <a:lnTo>
+                    <a:pt x="2672197" y="114550"/>
+                  </a:lnTo>
+                  <a:lnTo>
+                    <a:pt x="2595729" y="127612"/>
+                  </a:lnTo>
+                  <a:lnTo>
+                    <a:pt x="2519260" y="140414"/>
+                  </a:lnTo>
+                  <a:lnTo>
+                    <a:pt x="2442792" y="152959"/>
+                  </a:lnTo>
+                  <a:lnTo>
+                    <a:pt x="2366323" y="165254"/>
+                  </a:lnTo>
+                  <a:lnTo>
+                    <a:pt x="2289855" y="177304"/>
+                  </a:lnTo>
+                  <a:lnTo>
+                    <a:pt x="2213386" y="189113"/>
+                  </a:lnTo>
+                  <a:lnTo>
+                    <a:pt x="2136918" y="200686"/>
+                  </a:lnTo>
+                  <a:lnTo>
+                    <a:pt x="2060450" y="212028"/>
+                  </a:lnTo>
+                  <a:lnTo>
+                    <a:pt x="1983981" y="223143"/>
+                  </a:lnTo>
+                  <a:lnTo>
+                    <a:pt x="1907513" y="234036"/>
+                  </a:lnTo>
+                  <a:lnTo>
+                    <a:pt x="1831044" y="244712"/>
+                  </a:lnTo>
+                  <a:lnTo>
+                    <a:pt x="1754576" y="255175"/>
+                  </a:lnTo>
+                  <a:lnTo>
+                    <a:pt x="1678107" y="265428"/>
+                  </a:lnTo>
+                  <a:lnTo>
+                    <a:pt x="1601639" y="275477"/>
+                  </a:lnTo>
+                  <a:lnTo>
+                    <a:pt x="1525171" y="285325"/>
+                  </a:lnTo>
+                  <a:lnTo>
+                    <a:pt x="1448702" y="294977"/>
+                  </a:lnTo>
+                  <a:lnTo>
+                    <a:pt x="1372234" y="304435"/>
+                  </a:lnTo>
+                  <a:lnTo>
+                    <a:pt x="1295765" y="313705"/>
+                  </a:lnTo>
+                  <a:lnTo>
+                    <a:pt x="1219297" y="322790"/>
+                  </a:lnTo>
+                  <a:lnTo>
+                    <a:pt x="1142828" y="331693"/>
+                  </a:lnTo>
+                  <a:lnTo>
+                    <a:pt x="1066360" y="340418"/>
+                  </a:lnTo>
+                  <a:lnTo>
+                    <a:pt x="989892" y="348969"/>
+                  </a:lnTo>
+                  <a:lnTo>
+                    <a:pt x="913423" y="357349"/>
+                  </a:lnTo>
+                  <a:lnTo>
+                    <a:pt x="836955" y="365562"/>
+                  </a:lnTo>
+                  <a:lnTo>
+                    <a:pt x="760486" y="373611"/>
+                  </a:lnTo>
+                  <a:lnTo>
+                    <a:pt x="684018" y="381499"/>
+                  </a:lnTo>
+                  <a:lnTo>
+                    <a:pt x="607549" y="389230"/>
+                  </a:lnTo>
+                  <a:lnTo>
+                    <a:pt x="531081" y="396806"/>
+                  </a:lnTo>
+                  <a:lnTo>
+                    <a:pt x="454613" y="404231"/>
+                  </a:lnTo>
+                  <a:lnTo>
+                    <a:pt x="378144" y="411508"/>
+                  </a:lnTo>
+                  <a:lnTo>
+                    <a:pt x="301676" y="418639"/>
+                  </a:lnTo>
+                  <a:lnTo>
+                    <a:pt x="225207" y="425628"/>
+                  </a:lnTo>
+                  <a:lnTo>
+                    <a:pt x="148739" y="432477"/>
+                  </a:lnTo>
+                  <a:lnTo>
+                    <a:pt x="72270" y="439189"/>
+                  </a:lnTo>
+                  <a:lnTo>
+                    <a:pt x="0" y="445407"/>
                   </a:lnTo>
                 </a:path>
               </a:pathLst>
@@ -4145,306 +4532,306 @@
         </p:sp>
         <p:sp>
           <p:nvSpPr>
-            <p:cNvPr id="24" name="pl24"/>
+            <p:cNvPr id="33" name="pl33"/>
             <p:cNvSpPr/>
             <p:nvPr/>
           </p:nvSpPr>
           <p:spPr>
             <a:xfrm>
-              <a:off x="915645" y="3992546"/>
-              <a:ext cx="7260303" cy="1061463"/>
+              <a:off x="915645" y="4002501"/>
+              <a:ext cx="7260303" cy="1081484"/>
             </a:xfrm>
             <a:custGeom>
               <a:avLst/>
               <a:pathLst>
-                <a:path w="7260303" h="1061463">
+                <a:path w="7260303" h="1081484">
                   <a:moveTo>
                     <a:pt x="0" y="0"/>
                   </a:moveTo>
                   <a:lnTo>
-                    <a:pt x="72270" y="19207"/>
-                  </a:lnTo>
-                  <a:lnTo>
-                    <a:pt x="148739" y="39240"/>
-                  </a:lnTo>
-                  <a:lnTo>
-                    <a:pt x="225207" y="58989"/>
-                  </a:lnTo>
-                  <a:lnTo>
-                    <a:pt x="301676" y="78457"/>
-                  </a:lnTo>
-                  <a:lnTo>
-                    <a:pt x="378144" y="97649"/>
-                  </a:lnTo>
-                  <a:lnTo>
-                    <a:pt x="454613" y="116567"/>
-                  </a:lnTo>
-                  <a:lnTo>
-                    <a:pt x="531081" y="135216"/>
-                  </a:lnTo>
-                  <a:lnTo>
-                    <a:pt x="607549" y="153600"/>
-                  </a:lnTo>
-                  <a:lnTo>
-                    <a:pt x="684018" y="171723"/>
-                  </a:lnTo>
-                  <a:lnTo>
-                    <a:pt x="760486" y="189588"/>
-                  </a:lnTo>
-                  <a:lnTo>
-                    <a:pt x="836955" y="207199"/>
-                  </a:lnTo>
-                  <a:lnTo>
-                    <a:pt x="913423" y="224559"/>
-                  </a:lnTo>
-                  <a:lnTo>
-                    <a:pt x="989892" y="241673"/>
-                  </a:lnTo>
-                  <a:lnTo>
-                    <a:pt x="1066360" y="258543"/>
-                  </a:lnTo>
-                  <a:lnTo>
-                    <a:pt x="1142828" y="275174"/>
-                  </a:lnTo>
-                  <a:lnTo>
-                    <a:pt x="1219297" y="291568"/>
-                  </a:lnTo>
-                  <a:lnTo>
-                    <a:pt x="1295765" y="307729"/>
-                  </a:lnTo>
-                  <a:lnTo>
-                    <a:pt x="1372234" y="323660"/>
-                  </a:lnTo>
-                  <a:lnTo>
-                    <a:pt x="1448702" y="339364"/>
-                  </a:lnTo>
-                  <a:lnTo>
-                    <a:pt x="1525171" y="354845"/>
-                  </a:lnTo>
-                  <a:lnTo>
-                    <a:pt x="1601639" y="370106"/>
-                  </a:lnTo>
-                  <a:lnTo>
-                    <a:pt x="1678107" y="385150"/>
-                  </a:lnTo>
-                  <a:lnTo>
-                    <a:pt x="1754576" y="399980"/>
-                  </a:lnTo>
-                  <a:lnTo>
-                    <a:pt x="1831044" y="414600"/>
-                  </a:lnTo>
-                  <a:lnTo>
-                    <a:pt x="1907513" y="429011"/>
-                  </a:lnTo>
-                  <a:lnTo>
-                    <a:pt x="1983981" y="443217"/>
-                  </a:lnTo>
-                  <a:lnTo>
-                    <a:pt x="2060450" y="457222"/>
-                  </a:lnTo>
-                  <a:lnTo>
-                    <a:pt x="2136918" y="471027"/>
-                  </a:lnTo>
-                  <a:lnTo>
-                    <a:pt x="2213386" y="484636"/>
-                  </a:lnTo>
-                  <a:lnTo>
-                    <a:pt x="2289855" y="498051"/>
-                  </a:lnTo>
-                  <a:lnTo>
-                    <a:pt x="2366323" y="511276"/>
-                  </a:lnTo>
-                  <a:lnTo>
-                    <a:pt x="2442792" y="524312"/>
-                  </a:lnTo>
-                  <a:lnTo>
-                    <a:pt x="2519260" y="537164"/>
-                  </a:lnTo>
-                  <a:lnTo>
-                    <a:pt x="2595729" y="549832"/>
-                  </a:lnTo>
-                  <a:lnTo>
-                    <a:pt x="2672197" y="562321"/>
-                  </a:lnTo>
-                  <a:lnTo>
-                    <a:pt x="2748666" y="574631"/>
-                  </a:lnTo>
-                  <a:lnTo>
-                    <a:pt x="2825134" y="586767"/>
-                  </a:lnTo>
-                  <a:lnTo>
-                    <a:pt x="2901602" y="598730"/>
-                  </a:lnTo>
-                  <a:lnTo>
-                    <a:pt x="2978071" y="610523"/>
-                  </a:lnTo>
-                  <a:lnTo>
-                    <a:pt x="3054539" y="622148"/>
-                  </a:lnTo>
-                  <a:lnTo>
-                    <a:pt x="3131008" y="633608"/>
-                  </a:lnTo>
-                  <a:lnTo>
-                    <a:pt x="3207476" y="644905"/>
-                  </a:lnTo>
-                  <a:lnTo>
-                    <a:pt x="3283945" y="656042"/>
-                  </a:lnTo>
-                  <a:lnTo>
-                    <a:pt x="3360413" y="667020"/>
-                  </a:lnTo>
-                  <a:lnTo>
-                    <a:pt x="3436881" y="677842"/>
-                  </a:lnTo>
-                  <a:lnTo>
-                    <a:pt x="3513350" y="688510"/>
-                  </a:lnTo>
-                  <a:lnTo>
-                    <a:pt x="3589818" y="699026"/>
-                  </a:lnTo>
-                  <a:lnTo>
-                    <a:pt x="3666287" y="709393"/>
-                  </a:lnTo>
-                  <a:lnTo>
-                    <a:pt x="3742755" y="719612"/>
-                  </a:lnTo>
-                  <a:lnTo>
-                    <a:pt x="3819224" y="729686"/>
-                  </a:lnTo>
-                  <a:lnTo>
-                    <a:pt x="3895692" y="739617"/>
-                  </a:lnTo>
-                  <a:lnTo>
-                    <a:pt x="3972160" y="749407"/>
-                  </a:lnTo>
-                  <a:lnTo>
-                    <a:pt x="4048629" y="759057"/>
-                  </a:lnTo>
-                  <a:lnTo>
-                    <a:pt x="4125097" y="768570"/>
-                  </a:lnTo>
-                  <a:lnTo>
-                    <a:pt x="4201566" y="777948"/>
-                  </a:lnTo>
-                  <a:lnTo>
-                    <a:pt x="4278034" y="787193"/>
-                  </a:lnTo>
-                  <a:lnTo>
-                    <a:pt x="4354503" y="796306"/>
-                  </a:lnTo>
-                  <a:lnTo>
-                    <a:pt x="4430971" y="805289"/>
-                  </a:lnTo>
-                  <a:lnTo>
-                    <a:pt x="4507439" y="814145"/>
-                  </a:lnTo>
-                  <a:lnTo>
-                    <a:pt x="4583908" y="822875"/>
-                  </a:lnTo>
-                  <a:lnTo>
-                    <a:pt x="4660376" y="831481"/>
-                  </a:lnTo>
-                  <a:lnTo>
-                    <a:pt x="4736845" y="839964"/>
-                  </a:lnTo>
-                  <a:lnTo>
-                    <a:pt x="4813313" y="848327"/>
-                  </a:lnTo>
-                  <a:lnTo>
-                    <a:pt x="4889782" y="856571"/>
-                  </a:lnTo>
-                  <a:lnTo>
-                    <a:pt x="4966250" y="864697"/>
-                  </a:lnTo>
-                  <a:lnTo>
-                    <a:pt x="5042719" y="872708"/>
-                  </a:lnTo>
-                  <a:lnTo>
-                    <a:pt x="5119187" y="880605"/>
-                  </a:lnTo>
-                  <a:lnTo>
-                    <a:pt x="5195655" y="888390"/>
-                  </a:lnTo>
-                  <a:lnTo>
-                    <a:pt x="5272124" y="896064"/>
-                  </a:lnTo>
-                  <a:lnTo>
-                    <a:pt x="5348592" y="903629"/>
-                  </a:lnTo>
-                  <a:lnTo>
-                    <a:pt x="5425061" y="911086"/>
-                  </a:lnTo>
-                  <a:lnTo>
-                    <a:pt x="5501529" y="918438"/>
-                  </a:lnTo>
-                  <a:lnTo>
-                    <a:pt x="5577998" y="925684"/>
-                  </a:lnTo>
-                  <a:lnTo>
-                    <a:pt x="5654466" y="932828"/>
-                  </a:lnTo>
-                  <a:lnTo>
-                    <a:pt x="5730934" y="939870"/>
-                  </a:lnTo>
-                  <a:lnTo>
-                    <a:pt x="5807403" y="946812"/>
-                  </a:lnTo>
-                  <a:lnTo>
-                    <a:pt x="5883871" y="953656"/>
-                  </a:lnTo>
-                  <a:lnTo>
-                    <a:pt x="5960340" y="960402"/>
-                  </a:lnTo>
-                  <a:lnTo>
-                    <a:pt x="6036808" y="967052"/>
-                  </a:lnTo>
-                  <a:lnTo>
-                    <a:pt x="6113277" y="973607"/>
-                  </a:lnTo>
-                  <a:lnTo>
-                    <a:pt x="6189745" y="980070"/>
-                  </a:lnTo>
-                  <a:lnTo>
-                    <a:pt x="6266213" y="986440"/>
-                  </a:lnTo>
-                  <a:lnTo>
-                    <a:pt x="6342682" y="992720"/>
-                  </a:lnTo>
-                  <a:lnTo>
-                    <a:pt x="6419150" y="998910"/>
-                  </a:lnTo>
-                  <a:lnTo>
-                    <a:pt x="6495619" y="1005013"/>
-                  </a:lnTo>
-                  <a:lnTo>
-                    <a:pt x="6572087" y="1011029"/>
-                  </a:lnTo>
-                  <a:lnTo>
-                    <a:pt x="6648556" y="1016959"/>
-                  </a:lnTo>
-                  <a:lnTo>
-                    <a:pt x="6725024" y="1022805"/>
-                  </a:lnTo>
-                  <a:lnTo>
-                    <a:pt x="6801492" y="1028567"/>
-                  </a:lnTo>
-                  <a:lnTo>
-                    <a:pt x="6877961" y="1034248"/>
-                  </a:lnTo>
-                  <a:lnTo>
-                    <a:pt x="6954429" y="1039848"/>
-                  </a:lnTo>
-                  <a:lnTo>
-                    <a:pt x="7030898" y="1045368"/>
-                  </a:lnTo>
-                  <a:lnTo>
-                    <a:pt x="7107366" y="1050810"/>
-                  </a:lnTo>
-                  <a:lnTo>
-                    <a:pt x="7183835" y="1056175"/>
-                  </a:lnTo>
-                  <a:lnTo>
-                    <a:pt x="7260303" y="1061463"/>
+                    <a:pt x="72270" y="19569"/>
+                  </a:lnTo>
+                  <a:lnTo>
+                    <a:pt x="148739" y="39981"/>
+                  </a:lnTo>
+                  <a:lnTo>
+                    <a:pt x="225207" y="60102"/>
+                  </a:lnTo>
+                  <a:lnTo>
+                    <a:pt x="301676" y="79937"/>
+                  </a:lnTo>
+                  <a:lnTo>
+                    <a:pt x="378144" y="99490"/>
+                  </a:lnTo>
+                  <a:lnTo>
+                    <a:pt x="454613" y="118766"/>
+                  </a:lnTo>
+                  <a:lnTo>
+                    <a:pt x="531081" y="137767"/>
+                  </a:lnTo>
+                  <a:lnTo>
+                    <a:pt x="607549" y="156498"/>
+                  </a:lnTo>
+                  <a:lnTo>
+                    <a:pt x="684018" y="174962"/>
+                  </a:lnTo>
+                  <a:lnTo>
+                    <a:pt x="760486" y="193164"/>
+                  </a:lnTo>
+                  <a:lnTo>
+                    <a:pt x="836955" y="211107"/>
+                  </a:lnTo>
+                  <a:lnTo>
+                    <a:pt x="913423" y="228795"/>
+                  </a:lnTo>
+                  <a:lnTo>
+                    <a:pt x="989892" y="246232"/>
+                  </a:lnTo>
+                  <a:lnTo>
+                    <a:pt x="1066360" y="263420"/>
+                  </a:lnTo>
+                  <a:lnTo>
+                    <a:pt x="1142828" y="280364"/>
+                  </a:lnTo>
+                  <a:lnTo>
+                    <a:pt x="1219297" y="297067"/>
+                  </a:lnTo>
+                  <a:lnTo>
+                    <a:pt x="1295765" y="313533"/>
+                  </a:lnTo>
+                  <a:lnTo>
+                    <a:pt x="1372234" y="329765"/>
+                  </a:lnTo>
+                  <a:lnTo>
+                    <a:pt x="1448702" y="345765"/>
+                  </a:lnTo>
+                  <a:lnTo>
+                    <a:pt x="1525171" y="361538"/>
+                  </a:lnTo>
+                  <a:lnTo>
+                    <a:pt x="1601639" y="377087"/>
+                  </a:lnTo>
+                  <a:lnTo>
+                    <a:pt x="1678107" y="392415"/>
+                  </a:lnTo>
+                  <a:lnTo>
+                    <a:pt x="1754576" y="407525"/>
+                  </a:lnTo>
+                  <a:lnTo>
+                    <a:pt x="1831044" y="422420"/>
+                  </a:lnTo>
+                  <a:lnTo>
+                    <a:pt x="1907513" y="437103"/>
+                  </a:lnTo>
+                  <a:lnTo>
+                    <a:pt x="1983981" y="451577"/>
+                  </a:lnTo>
+                  <a:lnTo>
+                    <a:pt x="2060450" y="465846"/>
+                  </a:lnTo>
+                  <a:lnTo>
+                    <a:pt x="2136918" y="479912"/>
+                  </a:lnTo>
+                  <a:lnTo>
+                    <a:pt x="2213386" y="493777"/>
+                  </a:lnTo>
+                  <a:lnTo>
+                    <a:pt x="2289855" y="507446"/>
+                  </a:lnTo>
+                  <a:lnTo>
+                    <a:pt x="2366323" y="520920"/>
+                  </a:lnTo>
+                  <a:lnTo>
+                    <a:pt x="2442792" y="534202"/>
+                  </a:lnTo>
+                  <a:lnTo>
+                    <a:pt x="2519260" y="547296"/>
+                  </a:lnTo>
+                  <a:lnTo>
+                    <a:pt x="2595729" y="560203"/>
+                  </a:lnTo>
+                  <a:lnTo>
+                    <a:pt x="2672197" y="572927"/>
+                  </a:lnTo>
+                  <a:lnTo>
+                    <a:pt x="2748666" y="585470"/>
+                  </a:lnTo>
+                  <a:lnTo>
+                    <a:pt x="2825134" y="597835"/>
+                  </a:lnTo>
+                  <a:lnTo>
+                    <a:pt x="2901602" y="610023"/>
+                  </a:lnTo>
+                  <a:lnTo>
+                    <a:pt x="2978071" y="622039"/>
+                  </a:lnTo>
+                  <a:lnTo>
+                    <a:pt x="3054539" y="633883"/>
+                  </a:lnTo>
+                  <a:lnTo>
+                    <a:pt x="3131008" y="645560"/>
+                  </a:lnTo>
+                  <a:lnTo>
+                    <a:pt x="3207476" y="657070"/>
+                  </a:lnTo>
+                  <a:lnTo>
+                    <a:pt x="3283945" y="668416"/>
+                  </a:lnTo>
+                  <a:lnTo>
+                    <a:pt x="3360413" y="679601"/>
+                  </a:lnTo>
+                  <a:lnTo>
+                    <a:pt x="3436881" y="690627"/>
+                  </a:lnTo>
+                  <a:lnTo>
+                    <a:pt x="3513350" y="701497"/>
+                  </a:lnTo>
+                  <a:lnTo>
+                    <a:pt x="3589818" y="712211"/>
+                  </a:lnTo>
+                  <a:lnTo>
+                    <a:pt x="3666287" y="722774"/>
+                  </a:lnTo>
+                  <a:lnTo>
+                    <a:pt x="3742755" y="733186"/>
+                  </a:lnTo>
+                  <a:lnTo>
+                    <a:pt x="3819224" y="743450"/>
+                  </a:lnTo>
+                  <a:lnTo>
+                    <a:pt x="3895692" y="753568"/>
+                  </a:lnTo>
+                  <a:lnTo>
+                    <a:pt x="3972160" y="763542"/>
+                  </a:lnTo>
+                  <a:lnTo>
+                    <a:pt x="4048629" y="773375"/>
+                  </a:lnTo>
+                  <a:lnTo>
+                    <a:pt x="4125097" y="783067"/>
+                  </a:lnTo>
+                  <a:lnTo>
+                    <a:pt x="4201566" y="792622"/>
+                  </a:lnTo>
+                  <a:lnTo>
+                    <a:pt x="4278034" y="802041"/>
+                  </a:lnTo>
+                  <a:lnTo>
+                    <a:pt x="4354503" y="811326"/>
+                  </a:lnTo>
+                  <a:lnTo>
+                    <a:pt x="4430971" y="820479"/>
+                  </a:lnTo>
+                  <a:lnTo>
+                    <a:pt x="4507439" y="829502"/>
+                  </a:lnTo>
+                  <a:lnTo>
+                    <a:pt x="4583908" y="838396"/>
+                  </a:lnTo>
+                  <a:lnTo>
+                    <a:pt x="4660376" y="847164"/>
+                  </a:lnTo>
+                  <a:lnTo>
+                    <a:pt x="4736845" y="855808"/>
+                  </a:lnTo>
+                  <a:lnTo>
+                    <a:pt x="4813313" y="864328"/>
+                  </a:lnTo>
+                  <a:lnTo>
+                    <a:pt x="4889782" y="872727"/>
+                  </a:lnTo>
+                  <a:lnTo>
+                    <a:pt x="4966250" y="881007"/>
+                  </a:lnTo>
+                  <a:lnTo>
+                    <a:pt x="5042719" y="889169"/>
+                  </a:lnTo>
+                  <a:lnTo>
+                    <a:pt x="5119187" y="897215"/>
+                  </a:lnTo>
+                  <a:lnTo>
+                    <a:pt x="5195655" y="905147"/>
+                  </a:lnTo>
+                  <a:lnTo>
+                    <a:pt x="5272124" y="912966"/>
+                  </a:lnTo>
+                  <a:lnTo>
+                    <a:pt x="5348592" y="920673"/>
+                  </a:lnTo>
+                  <a:lnTo>
+                    <a:pt x="5425061" y="928271"/>
+                  </a:lnTo>
+                  <a:lnTo>
+                    <a:pt x="5501529" y="935761"/>
+                  </a:lnTo>
+                  <a:lnTo>
+                    <a:pt x="5577998" y="943145"/>
+                  </a:lnTo>
+                  <a:lnTo>
+                    <a:pt x="5654466" y="950423"/>
+                  </a:lnTo>
+                  <a:lnTo>
+                    <a:pt x="5730934" y="957598"/>
+                  </a:lnTo>
+                  <a:lnTo>
+                    <a:pt x="5807403" y="964671"/>
+                  </a:lnTo>
+                  <a:lnTo>
+                    <a:pt x="5883871" y="971644"/>
+                  </a:lnTo>
+                  <a:lnTo>
+                    <a:pt x="5960340" y="978517"/>
+                  </a:lnTo>
+                  <a:lnTo>
+                    <a:pt x="6036808" y="985293"/>
+                  </a:lnTo>
+                  <a:lnTo>
+                    <a:pt x="6113277" y="991972"/>
+                  </a:lnTo>
+                  <a:lnTo>
+                    <a:pt x="6189745" y="998556"/>
+                  </a:lnTo>
+                  <a:lnTo>
+                    <a:pt x="6266213" y="1005046"/>
+                  </a:lnTo>
+                  <a:lnTo>
+                    <a:pt x="6342682" y="1011445"/>
+                  </a:lnTo>
+                  <a:lnTo>
+                    <a:pt x="6419150" y="1017752"/>
+                  </a:lnTo>
+                  <a:lnTo>
+                    <a:pt x="6495619" y="1023970"/>
+                  </a:lnTo>
+                  <a:lnTo>
+                    <a:pt x="6572087" y="1030099"/>
+                  </a:lnTo>
+                  <a:lnTo>
+                    <a:pt x="6648556" y="1036141"/>
+                  </a:lnTo>
+                  <a:lnTo>
+                    <a:pt x="6725024" y="1042097"/>
+                  </a:lnTo>
+                  <a:lnTo>
+                    <a:pt x="6801492" y="1047968"/>
+                  </a:lnTo>
+                  <a:lnTo>
+                    <a:pt x="6877961" y="1053756"/>
+                  </a:lnTo>
+                  <a:lnTo>
+                    <a:pt x="6954429" y="1059462"/>
+                  </a:lnTo>
+                  <a:lnTo>
+                    <a:pt x="7030898" y="1065086"/>
+                  </a:lnTo>
+                  <a:lnTo>
+                    <a:pt x="7107366" y="1070631"/>
+                  </a:lnTo>
+                  <a:lnTo>
+                    <a:pt x="7183835" y="1076097"/>
+                  </a:lnTo>
+                  <a:lnTo>
+                    <a:pt x="7260303" y="1081484"/>
                   </a:lnTo>
                 </a:path>
               </a:pathLst>
@@ -4467,13 +4854,13 @@
         </p:sp>
         <p:sp>
           <p:nvSpPr>
-            <p:cNvPr id="25" name="pl25"/>
+            <p:cNvPr id="34" name="pl34"/>
             <p:cNvSpPr/>
             <p:nvPr/>
           </p:nvSpPr>
           <p:spPr>
             <a:xfrm>
-              <a:off x="915645" y="4655980"/>
+              <a:off x="915645" y="4678449"/>
               <a:ext cx="7682587" cy="0"/>
             </a:xfrm>
             <a:custGeom>
@@ -4510,21 +4897,21 @@
         </p:sp>
         <p:sp>
           <p:nvSpPr>
-            <p:cNvPr id="26" name="pl26"/>
+            <p:cNvPr id="35" name="pl35"/>
             <p:cNvSpPr/>
             <p:nvPr/>
           </p:nvSpPr>
           <p:spPr>
             <a:xfrm>
-              <a:off x="4250960" y="2209169"/>
-              <a:ext cx="0" cy="3364365"/>
+              <a:off x="4250960" y="2185486"/>
+              <a:ext cx="0" cy="3427824"/>
             </a:xfrm>
             <a:custGeom>
               <a:avLst/>
               <a:pathLst>
-                <a:path w="0" h="3364365">
+                <a:path w="0" h="3427824">
                   <a:moveTo>
-                    <a:pt x="0" y="3364365"/>
+                    <a:pt x="0" y="3427824"/>
                   </a:moveTo>
                   <a:lnTo>
                     <a:pt x="0" y="0"/>
@@ -4553,13 +4940,13 @@
         </p:sp>
         <p:sp>
           <p:nvSpPr>
-            <p:cNvPr id="27" name="tx27"/>
+            <p:cNvPr id="36" name="tx36"/>
             <p:cNvSpPr/>
             <p:nvPr/>
           </p:nvSpPr>
           <p:spPr>
             <a:xfrm>
-              <a:off x="756929" y="5369631"/>
+              <a:off x="756929" y="5406523"/>
               <a:ext cx="79004" cy="101955"/>
             </a:xfrm>
             <a:prstGeom prst="rect">
@@ -4599,13 +4986,13 @@
         </p:sp>
         <p:sp>
           <p:nvSpPr>
-            <p:cNvPr id="28" name="tx28"/>
+            <p:cNvPr id="37" name="tx37"/>
             <p:cNvSpPr/>
             <p:nvPr/>
           </p:nvSpPr>
           <p:spPr>
             <a:xfrm>
-              <a:off x="756929" y="4605002"/>
+              <a:off x="756929" y="4627472"/>
               <a:ext cx="79004" cy="101955"/>
             </a:xfrm>
             <a:prstGeom prst="rect">
@@ -4645,13 +5032,13 @@
         </p:sp>
         <p:sp>
           <p:nvSpPr>
-            <p:cNvPr id="29" name="tx29"/>
+            <p:cNvPr id="38" name="tx38"/>
             <p:cNvSpPr/>
             <p:nvPr/>
           </p:nvSpPr>
           <p:spPr>
             <a:xfrm>
-              <a:off x="756929" y="3840374"/>
+              <a:off x="756929" y="3848420"/>
               <a:ext cx="79004" cy="101955"/>
             </a:xfrm>
             <a:prstGeom prst="rect">
@@ -4691,13 +5078,13 @@
         </p:sp>
         <p:sp>
           <p:nvSpPr>
-            <p:cNvPr id="30" name="tx30"/>
+            <p:cNvPr id="39" name="tx39"/>
             <p:cNvSpPr/>
             <p:nvPr/>
           </p:nvSpPr>
           <p:spPr>
             <a:xfrm>
-              <a:off x="756929" y="3075745"/>
+              <a:off x="756929" y="3069369"/>
               <a:ext cx="79004" cy="101955"/>
             </a:xfrm>
             <a:prstGeom prst="rect">
@@ -4737,13 +5124,13 @@
         </p:sp>
         <p:sp>
           <p:nvSpPr>
-            <p:cNvPr id="31" name="tx31"/>
+            <p:cNvPr id="40" name="tx40"/>
             <p:cNvSpPr/>
             <p:nvPr/>
           </p:nvSpPr>
           <p:spPr>
             <a:xfrm>
-              <a:off x="756929" y="2311117"/>
+              <a:off x="756929" y="2290318"/>
               <a:ext cx="79004" cy="101955"/>
             </a:xfrm>
             <a:prstGeom prst="rect">
@@ -4783,14 +5170,14 @@
         </p:sp>
         <p:sp>
           <p:nvSpPr>
-            <p:cNvPr id="32" name="tx32"/>
+            <p:cNvPr id="41" name="tx41"/>
             <p:cNvSpPr/>
             <p:nvPr/>
           </p:nvSpPr>
           <p:spPr>
             <a:xfrm>
-              <a:off x="2451993" y="5653245"/>
-              <a:ext cx="244784" cy="101955"/>
+              <a:off x="1598722" y="5693022"/>
+              <a:ext cx="205282" cy="101955"/>
             </a:xfrm>
             <a:prstGeom prst="rect">
               <a:avLst/>
@@ -4822,21 +5209,21 @@
                   <a:latin typeface="Helvetica"/>
                   <a:cs typeface="Helvetica"/>
                 </a:rPr>
-                <a:t>-0.2</a:t>
+                <a:t>-30</a:t>
               </a:r>
             </a:p>
           </p:txBody>
         </p:sp>
         <p:sp>
           <p:nvSpPr>
-            <p:cNvPr id="33" name="tx33"/>
+            <p:cNvPr id="42" name="tx42"/>
             <p:cNvSpPr/>
             <p:nvPr/>
           </p:nvSpPr>
           <p:spPr>
             <a:xfrm>
-              <a:off x="4221672" y="5653245"/>
-              <a:ext cx="197510" cy="101955"/>
+              <a:off x="2471744" y="5693022"/>
+              <a:ext cx="205282" cy="101955"/>
             </a:xfrm>
             <a:prstGeom prst="rect">
               <a:avLst/>
@@ -4868,21 +5255,21 @@
                   <a:latin typeface="Helvetica"/>
                   <a:cs typeface="Helvetica"/>
                 </a:rPr>
-                <a:t>0.0</a:t>
+                <a:t>-20</a:t>
               </a:r>
             </a:p>
           </p:txBody>
         </p:sp>
         <p:sp>
           <p:nvSpPr>
-            <p:cNvPr id="34" name="tx34"/>
+            <p:cNvPr id="43" name="tx43"/>
             <p:cNvSpPr/>
             <p:nvPr/>
           </p:nvSpPr>
           <p:spPr>
             <a:xfrm>
-              <a:off x="5967715" y="5653245"/>
-              <a:ext cx="197510" cy="101955"/>
+              <a:off x="3344765" y="5693022"/>
+              <a:ext cx="205282" cy="101955"/>
             </a:xfrm>
             <a:prstGeom prst="rect">
               <a:avLst/>
@@ -4914,21 +5301,21 @@
                   <a:latin typeface="Helvetica"/>
                   <a:cs typeface="Helvetica"/>
                 </a:rPr>
-                <a:t>0.2</a:t>
+                <a:t>-10</a:t>
               </a:r>
             </a:p>
           </p:txBody>
         </p:sp>
         <p:sp>
           <p:nvSpPr>
-            <p:cNvPr id="35" name="tx35"/>
+            <p:cNvPr id="44" name="tx44"/>
             <p:cNvSpPr/>
             <p:nvPr/>
           </p:nvSpPr>
           <p:spPr>
             <a:xfrm>
-              <a:off x="7713757" y="5653245"/>
-              <a:ext cx="197510" cy="101955"/>
+              <a:off x="4280925" y="5693022"/>
+              <a:ext cx="79004" cy="101955"/>
             </a:xfrm>
             <a:prstGeom prst="rect">
               <a:avLst/>
@@ -4960,21 +5347,205 @@
                   <a:latin typeface="Helvetica"/>
                   <a:cs typeface="Helvetica"/>
                 </a:rPr>
-                <a:t>0.4</a:t>
+                <a:t>0</a:t>
               </a:r>
             </a:p>
           </p:txBody>
         </p:sp>
         <p:sp>
           <p:nvSpPr>
-            <p:cNvPr id="36" name="tx36"/>
+            <p:cNvPr id="45" name="tx45"/>
             <p:cNvSpPr/>
             <p:nvPr/>
           </p:nvSpPr>
           <p:spPr>
             <a:xfrm>
-              <a:off x="2688337" y="5834415"/>
-              <a:ext cx="2138873" cy="127558"/>
+              <a:off x="5114445" y="5693022"/>
+              <a:ext cx="158008" cy="101955"/>
+            </a:xfrm>
+            <a:prstGeom prst="rect">
+              <a:avLst/>
+            </a:prstGeom>
+            <a:noFill/>
+          </p:spPr>
+          <p:txBody>
+            <a:bodyPr lIns="0" rIns="0" tIns="0" bIns="0" anchorCtr="1" anchor="ctr" wrap="none"/>
+            <a:lstStyle/>
+            <a:p>
+              <a:pPr algn="l" marL="0" marR="0" indent="0">
+                <a:lnSpc>
+                  <a:spcPts val="1120"/>
+                </a:lnSpc>
+                <a:spcBef>
+                  <a:spcPts val="0"/>
+                </a:spcBef>
+                <a:spcAft>
+                  <a:spcPts val="0"/>
+                </a:spcAft>
+              </a:pPr>
+              <a:r>
+                <a:rPr sz="1120">
+                  <a:solidFill>
+                    <a:srgbClr val="4D4D4D">
+                      <a:alpha val="100000"/>
+                    </a:srgbClr>
+                  </a:solidFill>
+                  <a:latin typeface="Helvetica"/>
+                  <a:cs typeface="Helvetica"/>
+                </a:rPr>
+                <a:t>10</a:t>
+              </a:r>
+            </a:p>
+          </p:txBody>
+        </p:sp>
+        <p:sp>
+          <p:nvSpPr>
+            <p:cNvPr id="46" name="tx46"/>
+            <p:cNvSpPr/>
+            <p:nvPr/>
+          </p:nvSpPr>
+          <p:spPr>
+            <a:xfrm>
+              <a:off x="5987466" y="5693022"/>
+              <a:ext cx="158008" cy="101955"/>
+            </a:xfrm>
+            <a:prstGeom prst="rect">
+              <a:avLst/>
+            </a:prstGeom>
+            <a:noFill/>
+          </p:spPr>
+          <p:txBody>
+            <a:bodyPr lIns="0" rIns="0" tIns="0" bIns="0" anchorCtr="1" anchor="ctr" wrap="none"/>
+            <a:lstStyle/>
+            <a:p>
+              <a:pPr algn="l" marL="0" marR="0" indent="0">
+                <a:lnSpc>
+                  <a:spcPts val="1120"/>
+                </a:lnSpc>
+                <a:spcBef>
+                  <a:spcPts val="0"/>
+                </a:spcBef>
+                <a:spcAft>
+                  <a:spcPts val="0"/>
+                </a:spcAft>
+              </a:pPr>
+              <a:r>
+                <a:rPr sz="1120">
+                  <a:solidFill>
+                    <a:srgbClr val="4D4D4D">
+                      <a:alpha val="100000"/>
+                    </a:srgbClr>
+                  </a:solidFill>
+                  <a:latin typeface="Helvetica"/>
+                  <a:cs typeface="Helvetica"/>
+                </a:rPr>
+                <a:t>20</a:t>
+              </a:r>
+            </a:p>
+          </p:txBody>
+        </p:sp>
+        <p:sp>
+          <p:nvSpPr>
+            <p:cNvPr id="47" name="tx47"/>
+            <p:cNvSpPr/>
+            <p:nvPr/>
+          </p:nvSpPr>
+          <p:spPr>
+            <a:xfrm>
+              <a:off x="6860487" y="5693022"/>
+              <a:ext cx="158008" cy="101955"/>
+            </a:xfrm>
+            <a:prstGeom prst="rect">
+              <a:avLst/>
+            </a:prstGeom>
+            <a:noFill/>
+          </p:spPr>
+          <p:txBody>
+            <a:bodyPr lIns="0" rIns="0" tIns="0" bIns="0" anchorCtr="1" anchor="ctr" wrap="none"/>
+            <a:lstStyle/>
+            <a:p>
+              <a:pPr algn="l" marL="0" marR="0" indent="0">
+                <a:lnSpc>
+                  <a:spcPts val="1120"/>
+                </a:lnSpc>
+                <a:spcBef>
+                  <a:spcPts val="0"/>
+                </a:spcBef>
+                <a:spcAft>
+                  <a:spcPts val="0"/>
+                </a:spcAft>
+              </a:pPr>
+              <a:r>
+                <a:rPr sz="1120">
+                  <a:solidFill>
+                    <a:srgbClr val="4D4D4D">
+                      <a:alpha val="100000"/>
+                    </a:srgbClr>
+                  </a:solidFill>
+                  <a:latin typeface="Helvetica"/>
+                  <a:cs typeface="Helvetica"/>
+                </a:rPr>
+                <a:t>30</a:t>
+              </a:r>
+            </a:p>
+          </p:txBody>
+        </p:sp>
+        <p:sp>
+          <p:nvSpPr>
+            <p:cNvPr id="48" name="tx48"/>
+            <p:cNvSpPr/>
+            <p:nvPr/>
+          </p:nvSpPr>
+          <p:spPr>
+            <a:xfrm>
+              <a:off x="7733508" y="5693022"/>
+              <a:ext cx="158008" cy="101955"/>
+            </a:xfrm>
+            <a:prstGeom prst="rect">
+              <a:avLst/>
+            </a:prstGeom>
+            <a:noFill/>
+          </p:spPr>
+          <p:txBody>
+            <a:bodyPr lIns="0" rIns="0" tIns="0" bIns="0" anchorCtr="1" anchor="ctr" wrap="none"/>
+            <a:lstStyle/>
+            <a:p>
+              <a:pPr algn="l" marL="0" marR="0" indent="0">
+                <a:lnSpc>
+                  <a:spcPts val="1120"/>
+                </a:lnSpc>
+                <a:spcBef>
+                  <a:spcPts val="0"/>
+                </a:spcBef>
+                <a:spcAft>
+                  <a:spcPts val="0"/>
+                </a:spcAft>
+              </a:pPr>
+              <a:r>
+                <a:rPr sz="1120">
+                  <a:solidFill>
+                    <a:srgbClr val="4D4D4D">
+                      <a:alpha val="100000"/>
+                    </a:srgbClr>
+                  </a:solidFill>
+                  <a:latin typeface="Helvetica"/>
+                  <a:cs typeface="Helvetica"/>
+                </a:rPr>
+                <a:t>40</a:t>
+              </a:r>
+            </a:p>
+          </p:txBody>
+        </p:sp>
+        <p:sp>
+          <p:nvSpPr>
+            <p:cNvPr id="49" name="tx49"/>
+            <p:cNvSpPr/>
+            <p:nvPr/>
+          </p:nvSpPr>
+          <p:spPr>
+            <a:xfrm>
+              <a:off x="3941888" y="5870717"/>
+              <a:ext cx="1630100" cy="127558"/>
             </a:xfrm>
             <a:prstGeom prst="rect">
               <a:avLst/>
@@ -5006,572 +5577,20 @@
                   <a:latin typeface="Helvetica"/>
                   <a:cs typeface="Helvetica"/>
                 </a:rPr>
-                <a:t>eGFR difference  =  (eGFR</a:t>
+                <a:t>eGFR difference (%)</a:t>
               </a:r>
             </a:p>
           </p:txBody>
         </p:sp>
         <p:sp>
           <p:nvSpPr>
-            <p:cNvPr id="37" name="tx37"/>
-            <p:cNvSpPr/>
-            <p:nvPr/>
-          </p:nvSpPr>
-          <p:spPr>
-            <a:xfrm>
-              <a:off x="4827210" y="5905308"/>
-              <a:ext cx="89885" cy="89245"/>
-            </a:xfrm>
-            <a:prstGeom prst="rect">
-              <a:avLst/>
-            </a:prstGeom>
-            <a:noFill/>
-          </p:spPr>
-          <p:txBody>
-            <a:bodyPr lIns="0" rIns="0" tIns="0" bIns="0" anchorCtr="1" anchor="ctr" wrap="none"/>
-            <a:lstStyle/>
-            <a:p>
-              <a:pPr algn="l" marL="0" marR="0" indent="0">
-                <a:lnSpc>
-                  <a:spcPts val="979"/>
-                </a:lnSpc>
-                <a:spcBef>
-                  <a:spcPts val="0"/>
-                </a:spcBef>
-                <a:spcAft>
-                  <a:spcPts val="0"/>
-                </a:spcAft>
-              </a:pPr>
-              <a:r>
-                <a:rPr sz="979">
-                  <a:solidFill>
-                    <a:srgbClr val="000000">
-                      <a:alpha val="100000"/>
-                    </a:srgbClr>
-                  </a:solidFill>
-                  <a:latin typeface="Helvetica"/>
-                  <a:cs typeface="Helvetica"/>
-                </a:rPr>
-                <a:t>C</a:t>
-              </a:r>
-            </a:p>
-          </p:txBody>
-        </p:sp>
-        <p:sp>
-          <p:nvSpPr>
-            <p:cNvPr id="38" name="tx38"/>
-            <p:cNvSpPr/>
-            <p:nvPr/>
-          </p:nvSpPr>
-          <p:spPr>
-            <a:xfrm>
-              <a:off x="4917095" y="5905308"/>
-              <a:ext cx="89885" cy="89245"/>
-            </a:xfrm>
-            <a:prstGeom prst="rect">
-              <a:avLst/>
-            </a:prstGeom>
-            <a:noFill/>
-          </p:spPr>
-          <p:txBody>
-            <a:bodyPr lIns="0" rIns="0" tIns="0" bIns="0" anchorCtr="1" anchor="ctr" wrap="none"/>
-            <a:lstStyle/>
-            <a:p>
-              <a:pPr algn="l" marL="0" marR="0" indent="0">
-                <a:lnSpc>
-                  <a:spcPts val="979"/>
-                </a:lnSpc>
-                <a:spcBef>
-                  <a:spcPts val="0"/>
-                </a:spcBef>
-                <a:spcAft>
-                  <a:spcPts val="0"/>
-                </a:spcAft>
-              </a:pPr>
-              <a:r>
-                <a:rPr sz="979">
-                  <a:solidFill>
-                    <a:srgbClr val="000000">
-                      <a:alpha val="100000"/>
-                    </a:srgbClr>
-                  </a:solidFill>
-                  <a:latin typeface="Helvetica"/>
-                  <a:cs typeface="Helvetica"/>
-                </a:rPr>
-                <a:t>R</a:t>
-              </a:r>
-            </a:p>
-          </p:txBody>
-        </p:sp>
-        <p:sp>
-          <p:nvSpPr>
-            <p:cNvPr id="39" name="tx39"/>
-            <p:cNvSpPr/>
-            <p:nvPr/>
-          </p:nvSpPr>
-          <p:spPr>
-            <a:xfrm>
-              <a:off x="5006981" y="5884826"/>
-              <a:ext cx="68305" cy="109728"/>
-            </a:xfrm>
-            <a:prstGeom prst="rect">
-              <a:avLst/>
-            </a:prstGeom>
-            <a:noFill/>
-          </p:spPr>
-          <p:txBody>
-            <a:bodyPr lIns="0" rIns="0" tIns="0" bIns="0" anchorCtr="1" anchor="ctr" wrap="none"/>
-            <a:lstStyle/>
-            <a:p>
-              <a:pPr algn="l" marL="0" marR="0" indent="0">
-                <a:lnSpc>
-                  <a:spcPts val="979"/>
-                </a:lnSpc>
-                <a:spcBef>
-                  <a:spcPts val="0"/>
-                </a:spcBef>
-                <a:spcAft>
-                  <a:spcPts val="0"/>
-                </a:spcAft>
-              </a:pPr>
-              <a:r>
-                <a:rPr sz="979">
-                  <a:solidFill>
-                    <a:srgbClr val="000000">
-                      <a:alpha val="100000"/>
-                    </a:srgbClr>
-                  </a:solidFill>
-                  <a:latin typeface="Symbol"/>
-                  <a:cs typeface="Symbol"/>
-                </a:rPr>
-                <a:t>−</a:t>
-              </a:r>
-            </a:p>
-          </p:txBody>
-        </p:sp>
-        <p:sp>
-          <p:nvSpPr>
-            <p:cNvPr id="40" name="tx40"/>
-            <p:cNvSpPr/>
-            <p:nvPr/>
-          </p:nvSpPr>
-          <p:spPr>
-            <a:xfrm>
-              <a:off x="5075286" y="5905308"/>
-              <a:ext cx="89885" cy="89245"/>
-            </a:xfrm>
-            <a:prstGeom prst="rect">
-              <a:avLst/>
-            </a:prstGeom>
-            <a:noFill/>
-          </p:spPr>
-          <p:txBody>
-            <a:bodyPr lIns="0" rIns="0" tIns="0" bIns="0" anchorCtr="1" anchor="ctr" wrap="none"/>
-            <a:lstStyle/>
-            <a:p>
-              <a:pPr algn="l" marL="0" marR="0" indent="0">
-                <a:lnSpc>
-                  <a:spcPts val="979"/>
-                </a:lnSpc>
-                <a:spcBef>
-                  <a:spcPts val="0"/>
-                </a:spcBef>
-                <a:spcAft>
-                  <a:spcPts val="0"/>
-                </a:spcAft>
-              </a:pPr>
-              <a:r>
-                <a:rPr sz="979">
-                  <a:solidFill>
-                    <a:srgbClr val="000000">
-                      <a:alpha val="100000"/>
-                    </a:srgbClr>
-                  </a:solidFill>
-                  <a:latin typeface="Helvetica"/>
-                  <a:cs typeface="Helvetica"/>
-                </a:rPr>
-                <a:t>C</a:t>
-              </a:r>
-            </a:p>
-          </p:txBody>
-        </p:sp>
-        <p:sp>
-          <p:nvSpPr>
-            <p:cNvPr id="41" name="tx41"/>
-            <p:cNvSpPr/>
-            <p:nvPr/>
-          </p:nvSpPr>
-          <p:spPr>
-            <a:xfrm>
-              <a:off x="5165172" y="5905308"/>
-              <a:ext cx="83027" cy="89245"/>
-            </a:xfrm>
-            <a:prstGeom prst="rect">
-              <a:avLst/>
-            </a:prstGeom>
-            <a:noFill/>
-          </p:spPr>
-          <p:txBody>
-            <a:bodyPr lIns="0" rIns="0" tIns="0" bIns="0" anchorCtr="1" anchor="ctr" wrap="none"/>
-            <a:lstStyle/>
-            <a:p>
-              <a:pPr algn="l" marL="0" marR="0" indent="0">
-                <a:lnSpc>
-                  <a:spcPts val="979"/>
-                </a:lnSpc>
-                <a:spcBef>
-                  <a:spcPts val="0"/>
-                </a:spcBef>
-                <a:spcAft>
-                  <a:spcPts val="0"/>
-                </a:spcAft>
-              </a:pPr>
-              <a:r>
-                <a:rPr sz="979">
-                  <a:solidFill>
-                    <a:srgbClr val="000000">
-                      <a:alpha val="100000"/>
-                    </a:srgbClr>
-                  </a:solidFill>
-                  <a:latin typeface="Helvetica"/>
-                  <a:cs typeface="Helvetica"/>
-                </a:rPr>
-                <a:t>Y</a:t>
-              </a:r>
-            </a:p>
-          </p:txBody>
-        </p:sp>
-        <p:sp>
-          <p:nvSpPr>
-            <p:cNvPr id="42" name="tx42"/>
-            <p:cNvSpPr/>
-            <p:nvPr/>
-          </p:nvSpPr>
-          <p:spPr>
-            <a:xfrm>
-              <a:off x="5248199" y="5905308"/>
-              <a:ext cx="83027" cy="89245"/>
-            </a:xfrm>
-            <a:prstGeom prst="rect">
-              <a:avLst/>
-            </a:prstGeom>
-            <a:noFill/>
-          </p:spPr>
-          <p:txBody>
-            <a:bodyPr lIns="0" rIns="0" tIns="0" bIns="0" anchorCtr="1" anchor="ctr" wrap="none"/>
-            <a:lstStyle/>
-            <a:p>
-              <a:pPr algn="l" marL="0" marR="0" indent="0">
-                <a:lnSpc>
-                  <a:spcPts val="979"/>
-                </a:lnSpc>
-                <a:spcBef>
-                  <a:spcPts val="0"/>
-                </a:spcBef>
-                <a:spcAft>
-                  <a:spcPts val="0"/>
-                </a:spcAft>
-              </a:pPr>
-              <a:r>
-                <a:rPr sz="979">
-                  <a:solidFill>
-                    <a:srgbClr val="000000">
-                      <a:alpha val="100000"/>
-                    </a:srgbClr>
-                  </a:solidFill>
-                  <a:latin typeface="Helvetica"/>
-                  <a:cs typeface="Helvetica"/>
-                </a:rPr>
-                <a:t>S</a:t>
-              </a:r>
-            </a:p>
-          </p:txBody>
-        </p:sp>
-        <p:sp>
-          <p:nvSpPr>
-            <p:cNvPr id="43" name="tx43"/>
-            <p:cNvSpPr/>
-            <p:nvPr/>
-          </p:nvSpPr>
-          <p:spPr>
-            <a:xfrm>
-              <a:off x="5331227" y="5834415"/>
-              <a:ext cx="558149" cy="127558"/>
-            </a:xfrm>
-            <a:prstGeom prst="rect">
-              <a:avLst/>
-            </a:prstGeom>
-            <a:noFill/>
-          </p:spPr>
-          <p:txBody>
-            <a:bodyPr lIns="0" rIns="0" tIns="0" bIns="0" anchorCtr="1" anchor="ctr" wrap="none"/>
-            <a:lstStyle/>
-            <a:p>
-              <a:pPr algn="l" marL="0" marR="0" indent="0">
-                <a:lnSpc>
-                  <a:spcPts val="1400"/>
-                </a:lnSpc>
-                <a:spcBef>
-                  <a:spcPts val="0"/>
-                </a:spcBef>
-                <a:spcAft>
-                  <a:spcPts val="0"/>
-                </a:spcAft>
-              </a:pPr>
-              <a:r>
-                <a:rPr sz="1400">
-                  <a:solidFill>
-                    <a:srgbClr val="000000">
-                      <a:alpha val="100000"/>
-                    </a:srgbClr>
-                  </a:solidFill>
-                  <a:latin typeface="Helvetica"/>
-                  <a:cs typeface="Helvetica"/>
-                </a:rPr>
-                <a:t> − CrCl</a:t>
-              </a:r>
-            </a:p>
-          </p:txBody>
-        </p:sp>
-        <p:sp>
-          <p:nvSpPr>
-            <p:cNvPr id="44" name="tx44"/>
-            <p:cNvSpPr/>
-            <p:nvPr/>
-          </p:nvSpPr>
-          <p:spPr>
-            <a:xfrm>
-              <a:off x="5889377" y="5905308"/>
-              <a:ext cx="89885" cy="89245"/>
-            </a:xfrm>
-            <a:prstGeom prst="rect">
-              <a:avLst/>
-            </a:prstGeom>
-            <a:noFill/>
-          </p:spPr>
-          <p:txBody>
-            <a:bodyPr lIns="0" rIns="0" tIns="0" bIns="0" anchorCtr="1" anchor="ctr" wrap="none"/>
-            <a:lstStyle/>
-            <a:p>
-              <a:pPr algn="l" marL="0" marR="0" indent="0">
-                <a:lnSpc>
-                  <a:spcPts val="979"/>
-                </a:lnSpc>
-                <a:spcBef>
-                  <a:spcPts val="0"/>
-                </a:spcBef>
-                <a:spcAft>
-                  <a:spcPts val="0"/>
-                </a:spcAft>
-              </a:pPr>
-              <a:r>
-                <a:rPr sz="979">
-                  <a:solidFill>
-                    <a:srgbClr val="000000">
-                      <a:alpha val="100000"/>
-                    </a:srgbClr>
-                  </a:solidFill>
-                  <a:latin typeface="Helvetica"/>
-                  <a:cs typeface="Helvetica"/>
-                </a:rPr>
-                <a:t>C</a:t>
-              </a:r>
-            </a:p>
-          </p:txBody>
-        </p:sp>
-        <p:sp>
-          <p:nvSpPr>
-            <p:cNvPr id="45" name="tx45"/>
-            <p:cNvSpPr/>
-            <p:nvPr/>
-          </p:nvSpPr>
-          <p:spPr>
-            <a:xfrm>
-              <a:off x="5979262" y="5905308"/>
-              <a:ext cx="96743" cy="89245"/>
-            </a:xfrm>
-            <a:prstGeom prst="rect">
-              <a:avLst/>
-            </a:prstGeom>
-            <a:noFill/>
-          </p:spPr>
-          <p:txBody>
-            <a:bodyPr lIns="0" rIns="0" tIns="0" bIns="0" anchorCtr="1" anchor="ctr" wrap="none"/>
-            <a:lstStyle/>
-            <a:p>
-              <a:pPr algn="l" marL="0" marR="0" indent="0">
-                <a:lnSpc>
-                  <a:spcPts val="979"/>
-                </a:lnSpc>
-                <a:spcBef>
-                  <a:spcPts val="0"/>
-                </a:spcBef>
-                <a:spcAft>
-                  <a:spcPts val="0"/>
-                </a:spcAft>
-              </a:pPr>
-              <a:r>
-                <a:rPr sz="979">
-                  <a:solidFill>
-                    <a:srgbClr val="000000">
-                      <a:alpha val="100000"/>
-                    </a:srgbClr>
-                  </a:solidFill>
-                  <a:latin typeface="Helvetica"/>
-                  <a:cs typeface="Helvetica"/>
-                </a:rPr>
-                <a:t>G</a:t>
-              </a:r>
-            </a:p>
-          </p:txBody>
-        </p:sp>
-        <p:sp>
-          <p:nvSpPr>
-            <p:cNvPr id="46" name="tx46"/>
-            <p:cNvSpPr/>
-            <p:nvPr/>
-          </p:nvSpPr>
-          <p:spPr>
-            <a:xfrm>
-              <a:off x="6076006" y="5834415"/>
-              <a:ext cx="562904" cy="127558"/>
-            </a:xfrm>
-            <a:prstGeom prst="rect">
-              <a:avLst/>
-            </a:prstGeom>
-            <a:noFill/>
-          </p:spPr>
-          <p:txBody>
-            <a:bodyPr lIns="0" rIns="0" tIns="0" bIns="0" anchorCtr="1" anchor="ctr" wrap="none"/>
-            <a:lstStyle/>
-            <a:p>
-              <a:pPr algn="l" marL="0" marR="0" indent="0">
-                <a:lnSpc>
-                  <a:spcPts val="1400"/>
-                </a:lnSpc>
-                <a:spcBef>
-                  <a:spcPts val="0"/>
-                </a:spcBef>
-                <a:spcAft>
-                  <a:spcPts val="0"/>
-                </a:spcAft>
-              </a:pPr>
-              <a:r>
-                <a:rPr sz="1400">
-                  <a:solidFill>
-                    <a:srgbClr val="000000">
-                      <a:alpha val="100000"/>
-                    </a:srgbClr>
-                  </a:solidFill>
-                  <a:latin typeface="Helvetica"/>
-                  <a:cs typeface="Helvetica"/>
-                </a:rPr>
-                <a:t>) / CrCl</a:t>
-              </a:r>
-            </a:p>
-          </p:txBody>
-        </p:sp>
-        <p:sp>
-          <p:nvSpPr>
-            <p:cNvPr id="47" name="tx47"/>
-            <p:cNvSpPr/>
-            <p:nvPr/>
-          </p:nvSpPr>
-          <p:spPr>
-            <a:xfrm>
-              <a:off x="6638910" y="5905308"/>
-              <a:ext cx="89885" cy="89245"/>
-            </a:xfrm>
-            <a:prstGeom prst="rect">
-              <a:avLst/>
-            </a:prstGeom>
-            <a:noFill/>
-          </p:spPr>
-          <p:txBody>
-            <a:bodyPr lIns="0" rIns="0" tIns="0" bIns="0" anchorCtr="1" anchor="ctr" wrap="none"/>
-            <a:lstStyle/>
-            <a:p>
-              <a:pPr algn="l" marL="0" marR="0" indent="0">
-                <a:lnSpc>
-                  <a:spcPts val="979"/>
-                </a:lnSpc>
-                <a:spcBef>
-                  <a:spcPts val="0"/>
-                </a:spcBef>
-                <a:spcAft>
-                  <a:spcPts val="0"/>
-                </a:spcAft>
-              </a:pPr>
-              <a:r>
-                <a:rPr sz="979">
-                  <a:solidFill>
-                    <a:srgbClr val="000000">
-                      <a:alpha val="100000"/>
-                    </a:srgbClr>
-                  </a:solidFill>
-                  <a:latin typeface="Helvetica"/>
-                  <a:cs typeface="Helvetica"/>
-                </a:rPr>
-                <a:t>C</a:t>
-              </a:r>
-            </a:p>
-          </p:txBody>
-        </p:sp>
-        <p:sp>
-          <p:nvSpPr>
-            <p:cNvPr id="48" name="tx48"/>
-            <p:cNvSpPr/>
-            <p:nvPr/>
-          </p:nvSpPr>
-          <p:spPr>
-            <a:xfrm>
-              <a:off x="6728796" y="5905308"/>
-              <a:ext cx="96743" cy="89245"/>
-            </a:xfrm>
-            <a:prstGeom prst="rect">
-              <a:avLst/>
-            </a:prstGeom>
-            <a:noFill/>
-          </p:spPr>
-          <p:txBody>
-            <a:bodyPr lIns="0" rIns="0" tIns="0" bIns="0" anchorCtr="1" anchor="ctr" wrap="none"/>
-            <a:lstStyle/>
-            <a:p>
-              <a:pPr algn="l" marL="0" marR="0" indent="0">
-                <a:lnSpc>
-                  <a:spcPts val="979"/>
-                </a:lnSpc>
-                <a:spcBef>
-                  <a:spcPts val="0"/>
-                </a:spcBef>
-                <a:spcAft>
-                  <a:spcPts val="0"/>
-                </a:spcAft>
-              </a:pPr>
-              <a:r>
-                <a:rPr sz="979">
-                  <a:solidFill>
-                    <a:srgbClr val="000000">
-                      <a:alpha val="100000"/>
-                    </a:srgbClr>
-                  </a:solidFill>
-                  <a:latin typeface="Helvetica"/>
-                  <a:cs typeface="Helvetica"/>
-                </a:rPr>
-                <a:t>G</a:t>
-              </a:r>
-            </a:p>
-          </p:txBody>
-        </p:sp>
-        <p:sp>
-          <p:nvSpPr>
-            <p:cNvPr id="49" name="tx49"/>
+            <p:cNvPr id="50" name="tx50"/>
             <p:cNvSpPr/>
             <p:nvPr/>
           </p:nvSpPr>
           <p:spPr>
             <a:xfrm rot="-5400000">
-              <a:off x="-37527" y="3827572"/>
+              <a:off x="-37527" y="3835619"/>
               <a:ext cx="1294150" cy="127558"/>
             </a:xfrm>
             <a:prstGeom prst="rect">
@@ -5611,14 +5630,14 @@
         </p:sp>
         <p:sp>
           <p:nvSpPr>
-            <p:cNvPr id="50" name="tx50"/>
+            <p:cNvPr id="51" name="tx51"/>
             <p:cNvSpPr/>
             <p:nvPr/>
           </p:nvSpPr>
           <p:spPr>
             <a:xfrm>
               <a:off x="915645" y="1977589"/>
-              <a:ext cx="5929701" cy="109362"/>
+              <a:ext cx="3712646" cy="91165"/>
             </a:xfrm>
             <a:prstGeom prst="rect">
               <a:avLst/>
@@ -5631,7 +5650,7 @@
             <a:p>
               <a:pPr algn="l" marL="0" marR="0" indent="0">
                 <a:lnSpc>
-                  <a:spcPts val="1200"/>
+                  <a:spcPts val="1000"/>
                 </a:lnSpc>
                 <a:spcBef>
                   <a:spcPts val="0"/>
@@ -5641,7 +5660,7 @@
                 </a:spcAft>
               </a:pPr>
               <a:r>
-                <a:rPr sz="1200">
+                <a:rPr sz="1000">
                   <a:solidFill>
                     <a:srgbClr val="404040">
                       <a:alpha val="100000"/>
@@ -5650,14 +5669,14 @@
                   <a:latin typeface="Helvetica"/>
                   <a:cs typeface="Helvetica"/>
                 </a:rPr>
-                <a:t>subHR = 0.85 (95% CI 0.57-1.26), p = 0.416   (per 0.1-unit increase in eGFR difference)</a:t>
+                <a:t>subHR = 1.18 (95% CI 0.79-1.75), p = 0.416   (per 10% decrease)</a:t>
               </a:r>
             </a:p>
           </p:txBody>
         </p:sp>
         <p:sp>
           <p:nvSpPr>
-            <p:cNvPr id="51" name="tx51"/>
+            <p:cNvPr id="52" name="tx52"/>
             <p:cNvSpPr/>
             <p:nvPr/>
           </p:nvSpPr>
